--- a/Deck2_Improved_Pitch.pptx
+++ b/Deck2_Improved_Pitch.pptx
@@ -21,6 +21,10 @@
     <p:sldId id="267" r:id="rId15"/>
     <p:sldId id="268" r:id="rId16"/>
     <p:sldId id="271" r:id="rId17"/>
+    <p:sldId id="274" r:id="rId22"/>
+    <p:sldId id="275" r:id="rId23"/>
+    <p:sldId id="276" r:id="rId24"/>
+    <p:sldId id="277" r:id="rId25"/>
   </p:sldIdLst>
   <p:sldSz cx="12188825" cy="6858000"/>
   <p:notesSz cx="6858000" cy="9144000"/>
@@ -14497,6 +14501,5095 @@
                 <a:latin typeface="Calibri"/>
               </a:rPr>
               <a:t>kidscreativityconfidenceclub.com</a:t>
+            </a:r>
+          </a:p>
+        </p:txBody>
+      </p:sp>
+    </p:spTree>
+  </p:cSld>
+  <p:clrMapOvr>
+    <a:masterClrMapping/>
+  </p:clrMapOvr>
+</p:sld>
+</file>
+
+<file path=ppt/slides/slide16.xml><?xml version="1.0" encoding="utf-8"?>
+<p:sld xmlns:a="http://schemas.openxmlformats.org/drawingml/2006/main" xmlns:p="http://schemas.openxmlformats.org/presentationml/2006/main" xmlns:r="http://schemas.openxmlformats.org/officeDocument/2006/relationships">
+  <p:cSld>
+    <p:bg>
+      <p:bgPr>
+        <a:solidFill>
+          <a:srgbClr val="0D2C2C"/>
+        </a:solidFill>
+        <a:effectLst/>
+      </p:bgPr>
+    </p:bg>
+    <p:spTree>
+      <p:nvGrpSpPr>
+        <p:cNvPr id="1" name=""/>
+        <p:cNvGrpSpPr/>
+        <p:nvPr/>
+      </p:nvGrpSpPr>
+      <p:grpSpPr/>
+      <p:sp>
+        <p:nvSpPr>
+          <p:cNvPr id="2" name="Rectangle 1"/>
+          <p:cNvSpPr/>
+          <p:nvPr/>
+        </p:nvSpPr>
+        <p:spPr>
+          <a:xfrm>
+            <a:off x="0" y="73152"/>
+            <a:ext cx="12188952" cy="54864"/>
+          </a:xfrm>
+          <a:prstGeom prst="rect">
+            <a:avLst/>
+          </a:prstGeom>
+          <a:solidFill>
+            <a:srgbClr val="4CC8C3"/>
+          </a:solidFill>
+          <a:ln>
+            <a:noFill/>
+          </a:ln>
+        </p:spPr>
+        <p:style>
+          <a:lnRef idx="1">
+            <a:schemeClr val="accent1"/>
+          </a:lnRef>
+          <a:fillRef idx="3">
+            <a:schemeClr val="accent1"/>
+          </a:fillRef>
+          <a:effectRef idx="2">
+            <a:schemeClr val="accent1"/>
+          </a:effectRef>
+          <a:fontRef idx="minor">
+            <a:schemeClr val="lt1"/>
+          </a:fontRef>
+        </p:style>
+        <p:txBody>
+          <a:bodyPr rtlCol="0" anchor="ctr"/>
+          <a:lstStyle/>
+          <a:p>
+            <a:pPr algn="ctr"/>
+          </a:p>
+        </p:txBody>
+      </p:sp>
+      <p:sp>
+        <p:nvSpPr>
+          <p:cNvPr id="3" name="TextBox 2"/>
+          <p:cNvSpPr txBox="1"/>
+          <p:nvPr/>
+        </p:nvSpPr>
+        <p:spPr>
+          <a:xfrm>
+            <a:off x="457200" y="502920"/>
+            <a:ext cx="4572000" cy="365760"/>
+          </a:xfrm>
+          <a:prstGeom prst="rect">
+            <a:avLst/>
+          </a:prstGeom>
+          <a:noFill/>
+        </p:spPr>
+        <p:txBody>
+          <a:bodyPr wrap="square">
+            <a:spAutoFit/>
+          </a:bodyPr>
+          <a:lstStyle/>
+          <a:p>
+            <a:pPr algn="l"/>
+            <a:r>
+              <a:rPr sz="1050" b="1" i="0">
+                <a:solidFill>
+                  <a:srgbClr val="4CC8C3"/>
+                </a:solidFill>
+              </a:rPr>
+              <a:t>THE SOCIAL MEDIA DILEMMA</a:t>
+            </a:r>
+          </a:p>
+        </p:txBody>
+      </p:sp>
+      <p:sp>
+        <p:nvSpPr>
+          <p:cNvPr id="4" name="TextBox 3"/>
+          <p:cNvSpPr txBox="1"/>
+          <p:nvPr/>
+        </p:nvSpPr>
+        <p:spPr>
+          <a:xfrm>
+            <a:off x="11640312" y="6492240"/>
+            <a:ext cx="365760" cy="274320"/>
+          </a:xfrm>
+          <a:prstGeom prst="rect">
+            <a:avLst/>
+          </a:prstGeom>
+          <a:noFill/>
+        </p:spPr>
+        <p:txBody>
+          <a:bodyPr wrap="square">
+            <a:spAutoFit/>
+          </a:bodyPr>
+          <a:lstStyle/>
+          <a:p>
+            <a:pPr algn="r"/>
+            <a:r>
+              <a:rPr sz="950" b="0" i="0">
+                <a:solidFill>
+                  <a:srgbClr val="88AAA8"/>
+                </a:solidFill>
+              </a:rPr>
+              <a:t>16</a:t>
+            </a:r>
+          </a:p>
+        </p:txBody>
+      </p:sp>
+      <p:sp>
+        <p:nvSpPr>
+          <p:cNvPr id="5" name="TextBox 4"/>
+          <p:cNvSpPr txBox="1"/>
+          <p:nvPr/>
+        </p:nvSpPr>
+        <p:spPr>
+          <a:xfrm>
+            <a:off x="457200" y="914400"/>
+            <a:ext cx="8229600" cy="731520"/>
+          </a:xfrm>
+          <a:prstGeom prst="rect">
+            <a:avLst/>
+          </a:prstGeom>
+          <a:noFill/>
+        </p:spPr>
+        <p:txBody>
+          <a:bodyPr wrap="square">
+            <a:spAutoFit/>
+          </a:bodyPr>
+          <a:lstStyle/>
+          <a:p>
+            <a:pPr algn="l"/>
+            <a:r>
+              <a:rPr sz="3200" b="1" i="0">
+                <a:solidFill>
+                  <a:srgbClr val="FFFFFF"/>
+                </a:solidFill>
+              </a:rPr>
+              <a:t>55M Kids Want Social Media.</a:t>
+            </a:r>
+          </a:p>
+          <a:p>
+            <a:pPr algn="l"/>
+            <a:r>
+              <a:rPr sz="3200" b="1" i="0">
+                <a:solidFill>
+                  <a:srgbClr val="4CC8C3"/>
+                </a:solidFill>
+              </a:rPr>
+              <a:t>Half Their Parents Say No.</a:t>
+            </a:r>
+          </a:p>
+        </p:txBody>
+      </p:sp>
+      <p:sp>
+        <p:nvSpPr>
+          <p:cNvPr id="6" name="Rectangle 5"/>
+          <p:cNvSpPr/>
+          <p:nvPr/>
+        </p:nvSpPr>
+        <p:spPr>
+          <a:xfrm>
+            <a:off x="457200" y="1783080"/>
+            <a:ext cx="4572000" cy="45720"/>
+          </a:xfrm>
+          <a:prstGeom prst="rect">
+            <a:avLst/>
+          </a:prstGeom>
+          <a:solidFill>
+            <a:srgbClr val="4CC8C3"/>
+          </a:solidFill>
+          <a:ln>
+            <a:noFill/>
+          </a:ln>
+        </p:spPr>
+        <p:style>
+          <a:lnRef idx="1">
+            <a:schemeClr val="accent1"/>
+          </a:lnRef>
+          <a:fillRef idx="3">
+            <a:schemeClr val="accent1"/>
+          </a:fillRef>
+          <a:effectRef idx="2">
+            <a:schemeClr val="accent1"/>
+          </a:effectRef>
+          <a:fontRef idx="minor">
+            <a:schemeClr val="lt1"/>
+          </a:fontRef>
+        </p:style>
+        <p:txBody>
+          <a:bodyPr rtlCol="0" anchor="ctr"/>
+          <a:lstStyle/>
+          <a:p>
+            <a:pPr algn="ctr"/>
+          </a:p>
+        </p:txBody>
+      </p:sp>
+      <p:sp>
+        <p:nvSpPr>
+          <p:cNvPr id="7" name="TextBox 6"/>
+          <p:cNvSpPr txBox="1"/>
+          <p:nvPr/>
+        </p:nvSpPr>
+        <p:spPr>
+          <a:xfrm>
+            <a:off x="457200" y="1920240"/>
+            <a:ext cx="10972800" cy="502920"/>
+          </a:xfrm>
+          <a:prstGeom prst="rect">
+            <a:avLst/>
+          </a:prstGeom>
+          <a:noFill/>
+        </p:spPr>
+        <p:txBody>
+          <a:bodyPr wrap="square">
+            <a:spAutoFit/>
+          </a:bodyPr>
+          <a:lstStyle/>
+          <a:p>
+            <a:pPr algn="l"/>
+            <a:r>
+              <a:rPr sz="1500" b="0" i="1">
+                <a:solidFill>
+                  <a:srgbClr val="A0E1DF"/>
+                </a:solidFill>
+              </a:rPr>
+              <a:t>There is no safe platform built for kids. Every major social app is designed for adults — and kids pay the price.</a:t>
+            </a:r>
+          </a:p>
+        </p:txBody>
+      </p:sp>
+      <p:sp>
+        <p:nvSpPr>
+          <p:cNvPr id="8" name="Rounded Rectangle 7"/>
+          <p:cNvSpPr/>
+          <p:nvPr/>
+        </p:nvSpPr>
+        <p:spPr>
+          <a:xfrm>
+            <a:off x="457200" y="2606040"/>
+            <a:ext cx="5212080" cy="2651760"/>
+          </a:xfrm>
+          <a:prstGeom prst="roundRect">
+            <a:avLst/>
+          </a:prstGeom>
+          <a:solidFill>
+            <a:srgbClr val="063538"/>
+          </a:solidFill>
+          <a:ln>
+            <a:noFill/>
+          </a:ln>
+        </p:spPr>
+        <p:style>
+          <a:lnRef idx="1">
+            <a:schemeClr val="accent1"/>
+          </a:lnRef>
+          <a:fillRef idx="3">
+            <a:schemeClr val="accent1"/>
+          </a:fillRef>
+          <a:effectRef idx="2">
+            <a:schemeClr val="accent1"/>
+          </a:effectRef>
+          <a:fontRef idx="minor">
+            <a:schemeClr val="lt1"/>
+          </a:fontRef>
+        </p:style>
+        <p:txBody>
+          <a:bodyPr rtlCol="0" anchor="ctr"/>
+          <a:lstStyle/>
+          <a:p>
+            <a:pPr algn="ctr"/>
+          </a:p>
+        </p:txBody>
+      </p:sp>
+      <p:sp>
+        <p:nvSpPr>
+          <p:cNvPr id="9" name="Rectangle 8"/>
+          <p:cNvSpPr/>
+          <p:nvPr/>
+        </p:nvSpPr>
+        <p:spPr>
+          <a:xfrm>
+            <a:off x="457200" y="2606040"/>
+            <a:ext cx="5212080" cy="45720"/>
+          </a:xfrm>
+          <a:prstGeom prst="rect">
+            <a:avLst/>
+          </a:prstGeom>
+          <a:solidFill>
+            <a:srgbClr val="F47C5C"/>
+          </a:solidFill>
+          <a:ln>
+            <a:noFill/>
+          </a:ln>
+        </p:spPr>
+        <p:style>
+          <a:lnRef idx="1">
+            <a:schemeClr val="accent1"/>
+          </a:lnRef>
+          <a:fillRef idx="3">
+            <a:schemeClr val="accent1"/>
+          </a:fillRef>
+          <a:effectRef idx="2">
+            <a:schemeClr val="accent1"/>
+          </a:effectRef>
+          <a:fontRef idx="minor">
+            <a:schemeClr val="lt1"/>
+          </a:fontRef>
+        </p:style>
+        <p:txBody>
+          <a:bodyPr rtlCol="0" anchor="ctr"/>
+          <a:lstStyle/>
+          <a:p>
+            <a:pPr algn="ctr"/>
+          </a:p>
+        </p:txBody>
+      </p:sp>
+      <p:sp>
+        <p:nvSpPr>
+          <p:cNvPr id="10" name="TextBox 9"/>
+          <p:cNvSpPr txBox="1"/>
+          <p:nvPr/>
+        </p:nvSpPr>
+        <p:spPr>
+          <a:xfrm>
+            <a:off x="594360" y="2697480"/>
+            <a:ext cx="3657600" cy="365760"/>
+          </a:xfrm>
+          <a:prstGeom prst="rect">
+            <a:avLst/>
+          </a:prstGeom>
+          <a:noFill/>
+        </p:spPr>
+        <p:txBody>
+          <a:bodyPr wrap="square">
+            <a:spAutoFit/>
+          </a:bodyPr>
+          <a:lstStyle/>
+          <a:p>
+            <a:pPr algn="l"/>
+            <a:r>
+              <a:rPr sz="1200" b="1" i="0">
+                <a:solidFill>
+                  <a:srgbClr val="F47C5C"/>
+                </a:solidFill>
+              </a:rPr>
+              <a:t>⚠️  WHY PARENTS SAY NO</a:t>
+            </a:r>
+          </a:p>
+        </p:txBody>
+      </p:sp>
+      <p:sp>
+        <p:nvSpPr>
+          <p:cNvPr id="11" name="TextBox 10"/>
+          <p:cNvSpPr txBox="1"/>
+          <p:nvPr/>
+        </p:nvSpPr>
+        <p:spPr>
+          <a:xfrm>
+            <a:off x="594360" y="3145536"/>
+            <a:ext cx="365760" cy="347472"/>
+          </a:xfrm>
+          <a:prstGeom prst="rect">
+            <a:avLst/>
+          </a:prstGeom>
+          <a:noFill/>
+        </p:spPr>
+        <p:txBody>
+          <a:bodyPr wrap="square">
+            <a:spAutoFit/>
+          </a:bodyPr>
+          <a:lstStyle/>
+          <a:p>
+            <a:pPr algn="l"/>
+            <a:r>
+              <a:rPr sz="1200" b="0" i="0">
+                <a:solidFill>
+                  <a:srgbClr val="FFFFFF"/>
+                </a:solidFill>
+              </a:rPr>
+              <a:t>🚫</a:t>
+            </a:r>
+          </a:p>
+        </p:txBody>
+      </p:sp>
+      <p:sp>
+        <p:nvSpPr>
+          <p:cNvPr id="12" name="TextBox 11"/>
+          <p:cNvSpPr txBox="1"/>
+          <p:nvPr/>
+        </p:nvSpPr>
+        <p:spPr>
+          <a:xfrm>
+            <a:off x="1005840" y="3163824"/>
+            <a:ext cx="4480560" cy="347472"/>
+          </a:xfrm>
+          <a:prstGeom prst="rect">
+            <a:avLst/>
+          </a:prstGeom>
+          <a:noFill/>
+        </p:spPr>
+        <p:txBody>
+          <a:bodyPr wrap="square">
+            <a:spAutoFit/>
+          </a:bodyPr>
+          <a:lstStyle/>
+          <a:p>
+            <a:pPr algn="l"/>
+            <a:r>
+              <a:rPr sz="1200" b="0" i="0">
+                <a:solidFill>
+                  <a:srgbClr val="E8F4F3"/>
+                </a:solidFill>
+              </a:rPr>
+              <a:t>Predators &amp; strangers in DMs</a:t>
+            </a:r>
+          </a:p>
+        </p:txBody>
+      </p:sp>
+      <p:sp>
+        <p:nvSpPr>
+          <p:cNvPr id="13" name="TextBox 12"/>
+          <p:cNvSpPr txBox="1"/>
+          <p:nvPr/>
+        </p:nvSpPr>
+        <p:spPr>
+          <a:xfrm>
+            <a:off x="594360" y="3547872"/>
+            <a:ext cx="365760" cy="347472"/>
+          </a:xfrm>
+          <a:prstGeom prst="rect">
+            <a:avLst/>
+          </a:prstGeom>
+          <a:noFill/>
+        </p:spPr>
+        <p:txBody>
+          <a:bodyPr wrap="square">
+            <a:spAutoFit/>
+          </a:bodyPr>
+          <a:lstStyle/>
+          <a:p>
+            <a:pPr algn="l"/>
+            <a:r>
+              <a:rPr sz="1200" b="0" i="0">
+                <a:solidFill>
+                  <a:srgbClr val="FFFFFF"/>
+                </a:solidFill>
+              </a:rPr>
+              <a:t>📉</a:t>
+            </a:r>
+          </a:p>
+        </p:txBody>
+      </p:sp>
+      <p:sp>
+        <p:nvSpPr>
+          <p:cNvPr id="14" name="TextBox 13"/>
+          <p:cNvSpPr txBox="1"/>
+          <p:nvPr/>
+        </p:nvSpPr>
+        <p:spPr>
+          <a:xfrm>
+            <a:off x="1005840" y="3566160"/>
+            <a:ext cx="4480560" cy="347472"/>
+          </a:xfrm>
+          <a:prstGeom prst="rect">
+            <a:avLst/>
+          </a:prstGeom>
+          <a:noFill/>
+        </p:spPr>
+        <p:txBody>
+          <a:bodyPr wrap="square">
+            <a:spAutoFit/>
+          </a:bodyPr>
+          <a:lstStyle/>
+          <a:p>
+            <a:pPr algn="l"/>
+            <a:r>
+              <a:rPr sz="1200" b="0" i="0">
+                <a:solidFill>
+                  <a:srgbClr val="E8F4F3"/>
+                </a:solidFill>
+              </a:rPr>
+              <a:t>Cyberbullying &amp; comparison culture</a:t>
+            </a:r>
+          </a:p>
+        </p:txBody>
+      </p:sp>
+      <p:sp>
+        <p:nvSpPr>
+          <p:cNvPr id="15" name="TextBox 14"/>
+          <p:cNvSpPr txBox="1"/>
+          <p:nvPr/>
+        </p:nvSpPr>
+        <p:spPr>
+          <a:xfrm>
+            <a:off x="594360" y="3950208"/>
+            <a:ext cx="365760" cy="347472"/>
+          </a:xfrm>
+          <a:prstGeom prst="rect">
+            <a:avLst/>
+          </a:prstGeom>
+          <a:noFill/>
+        </p:spPr>
+        <p:txBody>
+          <a:bodyPr wrap="square">
+            <a:spAutoFit/>
+          </a:bodyPr>
+          <a:lstStyle/>
+          <a:p>
+            <a:pPr algn="l"/>
+            <a:r>
+              <a:rPr sz="1200" b="0" i="0">
+                <a:solidFill>
+                  <a:srgbClr val="FFFFFF"/>
+                </a:solidFill>
+              </a:rPr>
+              <a:t>🧠</a:t>
+            </a:r>
+          </a:p>
+        </p:txBody>
+      </p:sp>
+      <p:sp>
+        <p:nvSpPr>
+          <p:cNvPr id="16" name="TextBox 15"/>
+          <p:cNvSpPr txBox="1"/>
+          <p:nvPr/>
+        </p:nvSpPr>
+        <p:spPr>
+          <a:xfrm>
+            <a:off x="1005840" y="3968496"/>
+            <a:ext cx="4480560" cy="347472"/>
+          </a:xfrm>
+          <a:prstGeom prst="rect">
+            <a:avLst/>
+          </a:prstGeom>
+          <a:noFill/>
+        </p:spPr>
+        <p:txBody>
+          <a:bodyPr wrap="square">
+            <a:spAutoFit/>
+          </a:bodyPr>
+          <a:lstStyle/>
+          <a:p>
+            <a:pPr algn="l"/>
+            <a:r>
+              <a:rPr sz="1200" b="0" i="0">
+                <a:solidFill>
+                  <a:srgbClr val="E8F4F3"/>
+                </a:solidFill>
+              </a:rPr>
+              <a:t>Mental health risks, anxiety, FOMO</a:t>
+            </a:r>
+          </a:p>
+        </p:txBody>
+      </p:sp>
+      <p:sp>
+        <p:nvSpPr>
+          <p:cNvPr id="17" name="TextBox 16"/>
+          <p:cNvSpPr txBox="1"/>
+          <p:nvPr/>
+        </p:nvSpPr>
+        <p:spPr>
+          <a:xfrm>
+            <a:off x="594360" y="4352544"/>
+            <a:ext cx="365760" cy="347472"/>
+          </a:xfrm>
+          <a:prstGeom prst="rect">
+            <a:avLst/>
+          </a:prstGeom>
+          <a:noFill/>
+        </p:spPr>
+        <p:txBody>
+          <a:bodyPr wrap="square">
+            <a:spAutoFit/>
+          </a:bodyPr>
+          <a:lstStyle/>
+          <a:p>
+            <a:pPr algn="l"/>
+            <a:r>
+              <a:rPr sz="1200" b="0" i="0">
+                <a:solidFill>
+                  <a:srgbClr val="FFFFFF"/>
+                </a:solidFill>
+              </a:rPr>
+              <a:t>📵</a:t>
+            </a:r>
+          </a:p>
+        </p:txBody>
+      </p:sp>
+      <p:sp>
+        <p:nvSpPr>
+          <p:cNvPr id="18" name="TextBox 17"/>
+          <p:cNvSpPr txBox="1"/>
+          <p:nvPr/>
+        </p:nvSpPr>
+        <p:spPr>
+          <a:xfrm>
+            <a:off x="1005840" y="4370832"/>
+            <a:ext cx="4480560" cy="347472"/>
+          </a:xfrm>
+          <a:prstGeom prst="rect">
+            <a:avLst/>
+          </a:prstGeom>
+          <a:noFill/>
+        </p:spPr>
+        <p:txBody>
+          <a:bodyPr wrap="square">
+            <a:spAutoFit/>
+          </a:bodyPr>
+          <a:lstStyle/>
+          <a:p>
+            <a:pPr algn="l"/>
+            <a:r>
+              <a:rPr sz="1200" b="0" i="0">
+                <a:solidFill>
+                  <a:srgbClr val="E8F4F3"/>
+                </a:solidFill>
+              </a:rPr>
+              <a:t>Age-inappropriate content everywhere</a:t>
+            </a:r>
+          </a:p>
+        </p:txBody>
+      </p:sp>
+      <p:sp>
+        <p:nvSpPr>
+          <p:cNvPr id="19" name="TextBox 18"/>
+          <p:cNvSpPr txBox="1"/>
+          <p:nvPr/>
+        </p:nvSpPr>
+        <p:spPr>
+          <a:xfrm>
+            <a:off x="594360" y="4754880"/>
+            <a:ext cx="365760" cy="347472"/>
+          </a:xfrm>
+          <a:prstGeom prst="rect">
+            <a:avLst/>
+          </a:prstGeom>
+          <a:noFill/>
+        </p:spPr>
+        <p:txBody>
+          <a:bodyPr wrap="square">
+            <a:spAutoFit/>
+          </a:bodyPr>
+          <a:lstStyle/>
+          <a:p>
+            <a:pPr algn="l"/>
+            <a:r>
+              <a:rPr sz="1200" b="0" i="0">
+                <a:solidFill>
+                  <a:srgbClr val="FFFFFF"/>
+                </a:solidFill>
+              </a:rPr>
+              <a:t>👁️</a:t>
+            </a:r>
+          </a:p>
+        </p:txBody>
+      </p:sp>
+      <p:sp>
+        <p:nvSpPr>
+          <p:cNvPr id="20" name="TextBox 19"/>
+          <p:cNvSpPr txBox="1"/>
+          <p:nvPr/>
+        </p:nvSpPr>
+        <p:spPr>
+          <a:xfrm>
+            <a:off x="1005840" y="4773168"/>
+            <a:ext cx="4480560" cy="347472"/>
+          </a:xfrm>
+          <a:prstGeom prst="rect">
+            <a:avLst/>
+          </a:prstGeom>
+          <a:noFill/>
+        </p:spPr>
+        <p:txBody>
+          <a:bodyPr wrap="square">
+            <a:spAutoFit/>
+          </a:bodyPr>
+          <a:lstStyle/>
+          <a:p>
+            <a:pPr algn="l"/>
+            <a:r>
+              <a:rPr sz="1200" b="0" i="0">
+                <a:solidFill>
+                  <a:srgbClr val="E8F4F3"/>
+                </a:solidFill>
+              </a:rPr>
+              <a:t>Zero parental visibility or control</a:t>
+            </a:r>
+          </a:p>
+        </p:txBody>
+      </p:sp>
+      <p:sp>
+        <p:nvSpPr>
+          <p:cNvPr id="21" name="Rounded Rectangle 20"/>
+          <p:cNvSpPr/>
+          <p:nvPr/>
+        </p:nvSpPr>
+        <p:spPr>
+          <a:xfrm>
+            <a:off x="6126480" y="2606040"/>
+            <a:ext cx="5212080" cy="2651760"/>
+          </a:xfrm>
+          <a:prstGeom prst="roundRect">
+            <a:avLst/>
+          </a:prstGeom>
+          <a:solidFill>
+            <a:srgbClr val="063538"/>
+          </a:solidFill>
+          <a:ln>
+            <a:noFill/>
+          </a:ln>
+        </p:spPr>
+        <p:style>
+          <a:lnRef idx="1">
+            <a:schemeClr val="accent1"/>
+          </a:lnRef>
+          <a:fillRef idx="3">
+            <a:schemeClr val="accent1"/>
+          </a:fillRef>
+          <a:effectRef idx="2">
+            <a:schemeClr val="accent1"/>
+          </a:effectRef>
+          <a:fontRef idx="minor">
+            <a:schemeClr val="lt1"/>
+          </a:fontRef>
+        </p:style>
+        <p:txBody>
+          <a:bodyPr rtlCol="0" anchor="ctr"/>
+          <a:lstStyle/>
+          <a:p>
+            <a:pPr algn="ctr"/>
+          </a:p>
+        </p:txBody>
+      </p:sp>
+      <p:sp>
+        <p:nvSpPr>
+          <p:cNvPr id="22" name="Rectangle 21"/>
+          <p:cNvSpPr/>
+          <p:nvPr/>
+        </p:nvSpPr>
+        <p:spPr>
+          <a:xfrm>
+            <a:off x="6126480" y="2606040"/>
+            <a:ext cx="5212080" cy="45720"/>
+          </a:xfrm>
+          <a:prstGeom prst="rect">
+            <a:avLst/>
+          </a:prstGeom>
+          <a:solidFill>
+            <a:srgbClr val="4CC8C3"/>
+          </a:solidFill>
+          <a:ln>
+            <a:noFill/>
+          </a:ln>
+        </p:spPr>
+        <p:style>
+          <a:lnRef idx="1">
+            <a:schemeClr val="accent1"/>
+          </a:lnRef>
+          <a:fillRef idx="3">
+            <a:schemeClr val="accent1"/>
+          </a:fillRef>
+          <a:effectRef idx="2">
+            <a:schemeClr val="accent1"/>
+          </a:effectRef>
+          <a:fontRef idx="minor">
+            <a:schemeClr val="lt1"/>
+          </a:fontRef>
+        </p:style>
+        <p:txBody>
+          <a:bodyPr rtlCol="0" anchor="ctr"/>
+          <a:lstStyle/>
+          <a:p>
+            <a:pPr algn="ctr"/>
+          </a:p>
+        </p:txBody>
+      </p:sp>
+      <p:sp>
+        <p:nvSpPr>
+          <p:cNvPr id="23" name="TextBox 22"/>
+          <p:cNvSpPr txBox="1"/>
+          <p:nvPr/>
+        </p:nvSpPr>
+        <p:spPr>
+          <a:xfrm>
+            <a:off x="6263640" y="2697480"/>
+            <a:ext cx="4114800" cy="365760"/>
+          </a:xfrm>
+          <a:prstGeom prst="rect">
+            <a:avLst/>
+          </a:prstGeom>
+          <a:noFill/>
+        </p:spPr>
+        <p:txBody>
+          <a:bodyPr wrap="square">
+            <a:spAutoFit/>
+          </a:bodyPr>
+          <a:lstStyle/>
+          <a:p>
+            <a:pPr algn="l"/>
+            <a:r>
+              <a:rPr sz="1200" b="1" i="0">
+                <a:solidFill>
+                  <a:srgbClr val="4CC8C3"/>
+                </a:solidFill>
+              </a:rPr>
+              <a:t>✨  WHY KIDS WANT IN</a:t>
+            </a:r>
+          </a:p>
+        </p:txBody>
+      </p:sp>
+      <p:sp>
+        <p:nvSpPr>
+          <p:cNvPr id="24" name="TextBox 23"/>
+          <p:cNvSpPr txBox="1"/>
+          <p:nvPr/>
+        </p:nvSpPr>
+        <p:spPr>
+          <a:xfrm>
+            <a:off x="6263640" y="3145536"/>
+            <a:ext cx="365760" cy="347472"/>
+          </a:xfrm>
+          <a:prstGeom prst="rect">
+            <a:avLst/>
+          </a:prstGeom>
+          <a:noFill/>
+        </p:spPr>
+        <p:txBody>
+          <a:bodyPr wrap="square">
+            <a:spAutoFit/>
+          </a:bodyPr>
+          <a:lstStyle/>
+          <a:p>
+            <a:pPr algn="l"/>
+            <a:r>
+              <a:rPr sz="1200" b="0" i="0">
+                <a:solidFill>
+                  <a:srgbClr val="FFFFFF"/>
+                </a:solidFill>
+              </a:rPr>
+              <a:t>👑</a:t>
+            </a:r>
+          </a:p>
+        </p:txBody>
+      </p:sp>
+      <p:sp>
+        <p:nvSpPr>
+          <p:cNvPr id="25" name="TextBox 24"/>
+          <p:cNvSpPr txBox="1"/>
+          <p:nvPr/>
+        </p:nvSpPr>
+        <p:spPr>
+          <a:xfrm>
+            <a:off x="6675120" y="3163824"/>
+            <a:ext cx="4480560" cy="347472"/>
+          </a:xfrm>
+          <a:prstGeom prst="rect">
+            <a:avLst/>
+          </a:prstGeom>
+          <a:noFill/>
+        </p:spPr>
+        <p:txBody>
+          <a:bodyPr wrap="square">
+            <a:spAutoFit/>
+          </a:bodyPr>
+          <a:lstStyle/>
+          <a:p>
+            <a:pPr algn="l"/>
+            <a:r>
+              <a:rPr sz="1200" b="0" i="0">
+                <a:solidFill>
+                  <a:srgbClr val="E8F4F3"/>
+                </a:solidFill>
+              </a:rPr>
+              <a:t>It's where the culture is — they feel left out</a:t>
+            </a:r>
+          </a:p>
+        </p:txBody>
+      </p:sp>
+      <p:sp>
+        <p:nvSpPr>
+          <p:cNvPr id="26" name="TextBox 25"/>
+          <p:cNvSpPr txBox="1"/>
+          <p:nvPr/>
+        </p:nvSpPr>
+        <p:spPr>
+          <a:xfrm>
+            <a:off x="6263640" y="3547872"/>
+            <a:ext cx="365760" cy="347472"/>
+          </a:xfrm>
+          <a:prstGeom prst="rect">
+            <a:avLst/>
+          </a:prstGeom>
+          <a:noFill/>
+        </p:spPr>
+        <p:txBody>
+          <a:bodyPr wrap="square">
+            <a:spAutoFit/>
+          </a:bodyPr>
+          <a:lstStyle/>
+          <a:p>
+            <a:pPr algn="l"/>
+            <a:r>
+              <a:rPr sz="1200" b="0" i="0">
+                <a:solidFill>
+                  <a:srgbClr val="FFFFFF"/>
+                </a:solidFill>
+              </a:rPr>
+              <a:t>🤝</a:t>
+            </a:r>
+          </a:p>
+        </p:txBody>
+      </p:sp>
+      <p:sp>
+        <p:nvSpPr>
+          <p:cNvPr id="27" name="TextBox 26"/>
+          <p:cNvSpPr txBox="1"/>
+          <p:nvPr/>
+        </p:nvSpPr>
+        <p:spPr>
+          <a:xfrm>
+            <a:off x="6675120" y="3566160"/>
+            <a:ext cx="4480560" cy="347472"/>
+          </a:xfrm>
+          <a:prstGeom prst="rect">
+            <a:avLst/>
+          </a:prstGeom>
+          <a:noFill/>
+        </p:spPr>
+        <p:txBody>
+          <a:bodyPr wrap="square">
+            <a:spAutoFit/>
+          </a:bodyPr>
+          <a:lstStyle/>
+          <a:p>
+            <a:pPr algn="l"/>
+            <a:r>
+              <a:rPr sz="1200" b="0" i="0">
+                <a:solidFill>
+                  <a:srgbClr val="E8F4F3"/>
+                </a:solidFill>
+              </a:rPr>
+              <a:t>Peer belonging &amp; social status matter</a:t>
+            </a:r>
+          </a:p>
+        </p:txBody>
+      </p:sp>
+      <p:sp>
+        <p:nvSpPr>
+          <p:cNvPr id="28" name="TextBox 27"/>
+          <p:cNvSpPr txBox="1"/>
+          <p:nvPr/>
+        </p:nvSpPr>
+        <p:spPr>
+          <a:xfrm>
+            <a:off x="6263640" y="3950208"/>
+            <a:ext cx="365760" cy="347472"/>
+          </a:xfrm>
+          <a:prstGeom prst="rect">
+            <a:avLst/>
+          </a:prstGeom>
+          <a:noFill/>
+        </p:spPr>
+        <p:txBody>
+          <a:bodyPr wrap="square">
+            <a:spAutoFit/>
+          </a:bodyPr>
+          <a:lstStyle/>
+          <a:p>
+            <a:pPr algn="l"/>
+            <a:r>
+              <a:rPr sz="1200" b="0" i="0">
+                <a:solidFill>
+                  <a:srgbClr val="FFFFFF"/>
+                </a:solidFill>
+              </a:rPr>
+              <a:t>🎨</a:t>
+            </a:r>
+          </a:p>
+        </p:txBody>
+      </p:sp>
+      <p:sp>
+        <p:nvSpPr>
+          <p:cNvPr id="29" name="TextBox 28"/>
+          <p:cNvSpPr txBox="1"/>
+          <p:nvPr/>
+        </p:nvSpPr>
+        <p:spPr>
+          <a:xfrm>
+            <a:off x="6675120" y="3968496"/>
+            <a:ext cx="4480560" cy="347472"/>
+          </a:xfrm>
+          <a:prstGeom prst="rect">
+            <a:avLst/>
+          </a:prstGeom>
+          <a:noFill/>
+        </p:spPr>
+        <p:txBody>
+          <a:bodyPr wrap="square">
+            <a:spAutoFit/>
+          </a:bodyPr>
+          <a:lstStyle/>
+          <a:p>
+            <a:pPr algn="l"/>
+            <a:r>
+              <a:rPr sz="1200" b="0" i="0">
+                <a:solidFill>
+                  <a:srgbClr val="E8F4F3"/>
+                </a:solidFill>
+              </a:rPr>
+              <a:t>They want to share what they create</a:t>
+            </a:r>
+          </a:p>
+        </p:txBody>
+      </p:sp>
+      <p:sp>
+        <p:nvSpPr>
+          <p:cNvPr id="30" name="TextBox 29"/>
+          <p:cNvSpPr txBox="1"/>
+          <p:nvPr/>
+        </p:nvSpPr>
+        <p:spPr>
+          <a:xfrm>
+            <a:off x="6263640" y="4352544"/>
+            <a:ext cx="365760" cy="347472"/>
+          </a:xfrm>
+          <a:prstGeom prst="rect">
+            <a:avLst/>
+          </a:prstGeom>
+          <a:noFill/>
+        </p:spPr>
+        <p:txBody>
+          <a:bodyPr wrap="square">
+            <a:spAutoFit/>
+          </a:bodyPr>
+          <a:lstStyle/>
+          <a:p>
+            <a:pPr algn="l"/>
+            <a:r>
+              <a:rPr sz="1200" b="0" i="0">
+                <a:solidFill>
+                  <a:srgbClr val="FFFFFF"/>
+                </a:solidFill>
+              </a:rPr>
+              <a:t>💬</a:t>
+            </a:r>
+          </a:p>
+        </p:txBody>
+      </p:sp>
+      <p:sp>
+        <p:nvSpPr>
+          <p:cNvPr id="31" name="TextBox 30"/>
+          <p:cNvSpPr txBox="1"/>
+          <p:nvPr/>
+        </p:nvSpPr>
+        <p:spPr>
+          <a:xfrm>
+            <a:off x="6675120" y="4370832"/>
+            <a:ext cx="4480560" cy="347472"/>
+          </a:xfrm>
+          <a:prstGeom prst="rect">
+            <a:avLst/>
+          </a:prstGeom>
+          <a:noFill/>
+        </p:spPr>
+        <p:txBody>
+          <a:bodyPr wrap="square">
+            <a:spAutoFit/>
+          </a:bodyPr>
+          <a:lstStyle/>
+          <a:p>
+            <a:pPr algn="l"/>
+            <a:r>
+              <a:rPr sz="1200" b="0" i="0">
+                <a:solidFill>
+                  <a:srgbClr val="E8F4F3"/>
+                </a:solidFill>
+              </a:rPr>
+              <a:t>Connection with friends beyond school</a:t>
+            </a:r>
+          </a:p>
+        </p:txBody>
+      </p:sp>
+      <p:sp>
+        <p:nvSpPr>
+          <p:cNvPr id="32" name="TextBox 31"/>
+          <p:cNvSpPr txBox="1"/>
+          <p:nvPr/>
+        </p:nvSpPr>
+        <p:spPr>
+          <a:xfrm>
+            <a:off x="6263640" y="4754880"/>
+            <a:ext cx="365760" cy="347472"/>
+          </a:xfrm>
+          <a:prstGeom prst="rect">
+            <a:avLst/>
+          </a:prstGeom>
+          <a:noFill/>
+        </p:spPr>
+        <p:txBody>
+          <a:bodyPr wrap="square">
+            <a:spAutoFit/>
+          </a:bodyPr>
+          <a:lstStyle/>
+          <a:p>
+            <a:pPr algn="l"/>
+            <a:r>
+              <a:rPr sz="1200" b="0" i="0">
+                <a:solidFill>
+                  <a:srgbClr val="FFFFFF"/>
+                </a:solidFill>
+              </a:rPr>
+              <a:t>🌟</a:t>
+            </a:r>
+          </a:p>
+        </p:txBody>
+      </p:sp>
+      <p:sp>
+        <p:nvSpPr>
+          <p:cNvPr id="33" name="TextBox 32"/>
+          <p:cNvSpPr txBox="1"/>
+          <p:nvPr/>
+        </p:nvSpPr>
+        <p:spPr>
+          <a:xfrm>
+            <a:off x="6675120" y="4773168"/>
+            <a:ext cx="4480560" cy="347472"/>
+          </a:xfrm>
+          <a:prstGeom prst="rect">
+            <a:avLst/>
+          </a:prstGeom>
+          <a:noFill/>
+        </p:spPr>
+        <p:txBody>
+          <a:bodyPr wrap="square">
+            <a:spAutoFit/>
+          </a:bodyPr>
+          <a:lstStyle/>
+          <a:p>
+            <a:pPr algn="l"/>
+            <a:r>
+              <a:rPr sz="1200" b="0" i="0">
+                <a:solidFill>
+                  <a:srgbClr val="E8F4F3"/>
+                </a:solidFill>
+              </a:rPr>
+              <a:t>Recognition and visibility for their work</a:t>
+            </a:r>
+          </a:p>
+        </p:txBody>
+      </p:sp>
+      <p:sp>
+        <p:nvSpPr>
+          <p:cNvPr id="34" name="Rounded Rectangle 33"/>
+          <p:cNvSpPr/>
+          <p:nvPr/>
+        </p:nvSpPr>
+        <p:spPr>
+          <a:xfrm>
+            <a:off x="457200" y="5833872"/>
+            <a:ext cx="11155680" cy="658368"/>
+          </a:xfrm>
+          <a:prstGeom prst="roundRect">
+            <a:avLst/>
+          </a:prstGeom>
+          <a:solidFill>
+            <a:srgbClr val="28807D"/>
+          </a:solidFill>
+          <a:ln>
+            <a:noFill/>
+          </a:ln>
+        </p:spPr>
+        <p:style>
+          <a:lnRef idx="1">
+            <a:schemeClr val="accent1"/>
+          </a:lnRef>
+          <a:fillRef idx="3">
+            <a:schemeClr val="accent1"/>
+          </a:fillRef>
+          <a:effectRef idx="2">
+            <a:schemeClr val="accent1"/>
+          </a:effectRef>
+          <a:fontRef idx="minor">
+            <a:schemeClr val="lt1"/>
+          </a:fontRef>
+        </p:style>
+        <p:txBody>
+          <a:bodyPr rtlCol="0" anchor="ctr"/>
+          <a:lstStyle/>
+          <a:p>
+            <a:pPr algn="ctr"/>
+          </a:p>
+        </p:txBody>
+      </p:sp>
+      <p:sp>
+        <p:nvSpPr>
+          <p:cNvPr id="35" name="TextBox 34"/>
+          <p:cNvSpPr txBox="1"/>
+          <p:nvPr/>
+        </p:nvSpPr>
+        <p:spPr>
+          <a:xfrm>
+            <a:off x="640080" y="5925312"/>
+            <a:ext cx="10789920" cy="475488"/>
+          </a:xfrm>
+          <a:prstGeom prst="rect">
+            <a:avLst/>
+          </a:prstGeom>
+          <a:noFill/>
+        </p:spPr>
+        <p:txBody>
+          <a:bodyPr wrap="square">
+            <a:spAutoFit/>
+          </a:bodyPr>
+          <a:lstStyle/>
+          <a:p>
+            <a:pPr algn="l"/>
+            <a:r>
+              <a:rPr sz="1400" b="1" i="0">
+                <a:solidFill>
+                  <a:srgbClr val="063538"/>
+                </a:solidFill>
+              </a:rPr>
+              <a:t>= Both sides are right. The problem is that a safe middle ground has never existed — until now.</a:t>
+            </a:r>
+          </a:p>
+        </p:txBody>
+      </p:sp>
+    </p:spTree>
+  </p:cSld>
+  <p:clrMapOvr>
+    <a:masterClrMapping/>
+  </p:clrMapOvr>
+</p:sld>
+</file>
+
+<file path=ppt/slides/slide17.xml><?xml version="1.0" encoding="utf-8"?>
+<p:sld xmlns:a="http://schemas.openxmlformats.org/drawingml/2006/main" xmlns:p="http://schemas.openxmlformats.org/presentationml/2006/main" xmlns:r="http://schemas.openxmlformats.org/officeDocument/2006/relationships">
+  <p:cSld>
+    <p:bg>
+      <p:bgPr>
+        <a:solidFill>
+          <a:srgbClr val="0D2C2C"/>
+        </a:solidFill>
+        <a:effectLst/>
+      </p:bgPr>
+    </p:bg>
+    <p:spTree>
+      <p:nvGrpSpPr>
+        <p:cNvPr id="1" name=""/>
+        <p:cNvGrpSpPr/>
+        <p:nvPr/>
+      </p:nvGrpSpPr>
+      <p:grpSpPr/>
+      <p:sp>
+        <p:nvSpPr>
+          <p:cNvPr id="2" name="Rectangle 1"/>
+          <p:cNvSpPr/>
+          <p:nvPr/>
+        </p:nvSpPr>
+        <p:spPr>
+          <a:xfrm>
+            <a:off x="0" y="73152"/>
+            <a:ext cx="12188952" cy="54864"/>
+          </a:xfrm>
+          <a:prstGeom prst="rect">
+            <a:avLst/>
+          </a:prstGeom>
+          <a:solidFill>
+            <a:srgbClr val="4CC8C3"/>
+          </a:solidFill>
+          <a:ln>
+            <a:noFill/>
+          </a:ln>
+        </p:spPr>
+        <p:style>
+          <a:lnRef idx="1">
+            <a:schemeClr val="accent1"/>
+          </a:lnRef>
+          <a:fillRef idx="3">
+            <a:schemeClr val="accent1"/>
+          </a:fillRef>
+          <a:effectRef idx="2">
+            <a:schemeClr val="accent1"/>
+          </a:effectRef>
+          <a:fontRef idx="minor">
+            <a:schemeClr val="lt1"/>
+          </a:fontRef>
+        </p:style>
+        <p:txBody>
+          <a:bodyPr rtlCol="0" anchor="ctr"/>
+          <a:lstStyle/>
+          <a:p>
+            <a:pPr algn="ctr"/>
+          </a:p>
+        </p:txBody>
+      </p:sp>
+      <p:sp>
+        <p:nvSpPr>
+          <p:cNvPr id="3" name="TextBox 2"/>
+          <p:cNvSpPr txBox="1"/>
+          <p:nvPr/>
+        </p:nvSpPr>
+        <p:spPr>
+          <a:xfrm>
+            <a:off x="457200" y="502920"/>
+            <a:ext cx="4572000" cy="365760"/>
+          </a:xfrm>
+          <a:prstGeom prst="rect">
+            <a:avLst/>
+          </a:prstGeom>
+          <a:noFill/>
+        </p:spPr>
+        <p:txBody>
+          <a:bodyPr wrap="square">
+            <a:spAutoFit/>
+          </a:bodyPr>
+          <a:lstStyle/>
+          <a:p>
+            <a:pPr algn="l"/>
+            <a:r>
+              <a:rPr sz="1050" b="1" i="0">
+                <a:solidFill>
+                  <a:srgbClr val="4CC8C3"/>
+                </a:solidFill>
+              </a:rPr>
+              <a:t>THE PARENT DIVIDE</a:t>
+            </a:r>
+          </a:p>
+        </p:txBody>
+      </p:sp>
+      <p:sp>
+        <p:nvSpPr>
+          <p:cNvPr id="4" name="TextBox 3"/>
+          <p:cNvSpPr txBox="1"/>
+          <p:nvPr/>
+        </p:nvSpPr>
+        <p:spPr>
+          <a:xfrm>
+            <a:off x="11640312" y="6492240"/>
+            <a:ext cx="365760" cy="274320"/>
+          </a:xfrm>
+          <a:prstGeom prst="rect">
+            <a:avLst/>
+          </a:prstGeom>
+          <a:noFill/>
+        </p:spPr>
+        <p:txBody>
+          <a:bodyPr wrap="square">
+            <a:spAutoFit/>
+          </a:bodyPr>
+          <a:lstStyle/>
+          <a:p>
+            <a:pPr algn="r"/>
+            <a:r>
+              <a:rPr sz="950" b="0" i="0">
+                <a:solidFill>
+                  <a:srgbClr val="88AAA8"/>
+                </a:solidFill>
+              </a:rPr>
+              <a:t>17</a:t>
+            </a:r>
+          </a:p>
+        </p:txBody>
+      </p:sp>
+      <p:sp>
+        <p:nvSpPr>
+          <p:cNvPr id="5" name="TextBox 4"/>
+          <p:cNvSpPr txBox="1"/>
+          <p:nvPr/>
+        </p:nvSpPr>
+        <p:spPr>
+          <a:xfrm>
+            <a:off x="457200" y="914400"/>
+            <a:ext cx="8229600" cy="731520"/>
+          </a:xfrm>
+          <a:prstGeom prst="rect">
+            <a:avLst/>
+          </a:prstGeom>
+          <a:noFill/>
+        </p:spPr>
+        <p:txBody>
+          <a:bodyPr wrap="square">
+            <a:spAutoFit/>
+          </a:bodyPr>
+          <a:lstStyle/>
+          <a:p>
+            <a:pPr algn="l"/>
+            <a:r>
+              <a:rPr sz="2800" b="1" i="0">
+                <a:solidFill>
+                  <a:srgbClr val="FFFFFF"/>
+                </a:solidFill>
+              </a:rPr>
+              <a:t>Parents Are Split — And Neither Side Is Wrong.</a:t>
+            </a:r>
+          </a:p>
+        </p:txBody>
+      </p:sp>
+      <p:sp>
+        <p:nvSpPr>
+          <p:cNvPr id="6" name="Rectangle 5"/>
+          <p:cNvSpPr/>
+          <p:nvPr/>
+        </p:nvSpPr>
+        <p:spPr>
+          <a:xfrm>
+            <a:off x="457200" y="1691640"/>
+            <a:ext cx="4572000" cy="45720"/>
+          </a:xfrm>
+          <a:prstGeom prst="rect">
+            <a:avLst/>
+          </a:prstGeom>
+          <a:solidFill>
+            <a:srgbClr val="4CC8C3"/>
+          </a:solidFill>
+          <a:ln>
+            <a:noFill/>
+          </a:ln>
+        </p:spPr>
+        <p:style>
+          <a:lnRef idx="1">
+            <a:schemeClr val="accent1"/>
+          </a:lnRef>
+          <a:fillRef idx="3">
+            <a:schemeClr val="accent1"/>
+          </a:fillRef>
+          <a:effectRef idx="2">
+            <a:schemeClr val="accent1"/>
+          </a:effectRef>
+          <a:fontRef idx="minor">
+            <a:schemeClr val="lt1"/>
+          </a:fontRef>
+        </p:style>
+        <p:txBody>
+          <a:bodyPr rtlCol="0" anchor="ctr"/>
+          <a:lstStyle/>
+          <a:p>
+            <a:pPr algn="ctr"/>
+          </a:p>
+        </p:txBody>
+      </p:sp>
+      <p:sp>
+        <p:nvSpPr>
+          <p:cNvPr id="7" name="TextBox 6"/>
+          <p:cNvSpPr txBox="1"/>
+          <p:nvPr/>
+        </p:nvSpPr>
+        <p:spPr>
+          <a:xfrm>
+            <a:off x="457200" y="1828800"/>
+            <a:ext cx="10972800" cy="502920"/>
+          </a:xfrm>
+          <a:prstGeom prst="rect">
+            <a:avLst/>
+          </a:prstGeom>
+          <a:noFill/>
+        </p:spPr>
+        <p:txBody>
+          <a:bodyPr wrap="square">
+            <a:spAutoFit/>
+          </a:bodyPr>
+          <a:lstStyle/>
+          <a:p>
+            <a:pPr algn="l"/>
+            <a:r>
+              <a:rPr sz="1500" b="0" i="1">
+                <a:solidFill>
+                  <a:srgbClr val="A0E1DF"/>
+                </a:solidFill>
+              </a:rPr>
+              <a:t>The social media debate is one of the top parenting conflicts today — with no good solution on either side.</a:t>
+            </a:r>
+          </a:p>
+        </p:txBody>
+      </p:sp>
+      <p:sp>
+        <p:nvSpPr>
+          <p:cNvPr id="8" name="Rounded Rectangle 7"/>
+          <p:cNvSpPr/>
+          <p:nvPr/>
+        </p:nvSpPr>
+        <p:spPr>
+          <a:xfrm>
+            <a:off x="457200" y="2514600"/>
+            <a:ext cx="2560320" cy="2834640"/>
+          </a:xfrm>
+          <a:prstGeom prst="roundRect">
+            <a:avLst/>
+          </a:prstGeom>
+          <a:solidFill>
+            <a:srgbClr val="063538"/>
+          </a:solidFill>
+          <a:ln>
+            <a:noFill/>
+          </a:ln>
+        </p:spPr>
+        <p:style>
+          <a:lnRef idx="1">
+            <a:schemeClr val="accent1"/>
+          </a:lnRef>
+          <a:fillRef idx="3">
+            <a:schemeClr val="accent1"/>
+          </a:fillRef>
+          <a:effectRef idx="2">
+            <a:schemeClr val="accent1"/>
+          </a:effectRef>
+          <a:fontRef idx="minor">
+            <a:schemeClr val="lt1"/>
+          </a:fontRef>
+        </p:style>
+        <p:txBody>
+          <a:bodyPr rtlCol="0" anchor="ctr"/>
+          <a:lstStyle/>
+          <a:p>
+            <a:pPr algn="ctr"/>
+          </a:p>
+        </p:txBody>
+      </p:sp>
+      <p:sp>
+        <p:nvSpPr>
+          <p:cNvPr id="9" name="Rectangle 8"/>
+          <p:cNvSpPr/>
+          <p:nvPr/>
+        </p:nvSpPr>
+        <p:spPr>
+          <a:xfrm>
+            <a:off x="457200" y="2514600"/>
+            <a:ext cx="2560320" cy="45720"/>
+          </a:xfrm>
+          <a:prstGeom prst="rect">
+            <a:avLst/>
+          </a:prstGeom>
+          <a:solidFill>
+            <a:srgbClr val="4CC8C3"/>
+          </a:solidFill>
+          <a:ln>
+            <a:noFill/>
+          </a:ln>
+        </p:spPr>
+        <p:style>
+          <a:lnRef idx="1">
+            <a:schemeClr val="accent1"/>
+          </a:lnRef>
+          <a:fillRef idx="3">
+            <a:schemeClr val="accent1"/>
+          </a:fillRef>
+          <a:effectRef idx="2">
+            <a:schemeClr val="accent1"/>
+          </a:effectRef>
+          <a:fontRef idx="minor">
+            <a:schemeClr val="lt1"/>
+          </a:fontRef>
+        </p:style>
+        <p:txBody>
+          <a:bodyPr rtlCol="0" anchor="ctr"/>
+          <a:lstStyle/>
+          <a:p>
+            <a:pPr algn="ctr"/>
+          </a:p>
+        </p:txBody>
+      </p:sp>
+      <p:sp>
+        <p:nvSpPr>
+          <p:cNvPr id="10" name="TextBox 9"/>
+          <p:cNvSpPr txBox="1"/>
+          <p:nvPr/>
+        </p:nvSpPr>
+        <p:spPr>
+          <a:xfrm>
+            <a:off x="548640" y="2651760"/>
+            <a:ext cx="2377440" cy="777240"/>
+          </a:xfrm>
+          <a:prstGeom prst="rect">
+            <a:avLst/>
+          </a:prstGeom>
+          <a:noFill/>
+        </p:spPr>
+        <p:txBody>
+          <a:bodyPr wrap="square">
+            <a:spAutoFit/>
+          </a:bodyPr>
+          <a:lstStyle/>
+          <a:p>
+            <a:pPr algn="l"/>
+            <a:r>
+              <a:rPr sz="3600" b="1" i="0">
+                <a:solidFill>
+                  <a:srgbClr val="4CC8C3"/>
+                </a:solidFill>
+              </a:rPr>
+              <a:t>45%</a:t>
+            </a:r>
+          </a:p>
+        </p:txBody>
+      </p:sp>
+      <p:sp>
+        <p:nvSpPr>
+          <p:cNvPr id="11" name="TextBox 10"/>
+          <p:cNvSpPr txBox="1"/>
+          <p:nvPr/>
+        </p:nvSpPr>
+        <p:spPr>
+          <a:xfrm>
+            <a:off x="548640" y="3429000"/>
+            <a:ext cx="2377440" cy="1737360"/>
+          </a:xfrm>
+          <a:prstGeom prst="rect">
+            <a:avLst/>
+          </a:prstGeom>
+          <a:noFill/>
+        </p:spPr>
+        <p:txBody>
+          <a:bodyPr wrap="square">
+            <a:spAutoFit/>
+          </a:bodyPr>
+          <a:lstStyle/>
+          <a:p>
+            <a:pPr algn="l"/>
+            <a:r>
+              <a:rPr sz="1200" b="0" i="0">
+                <a:solidFill>
+                  <a:srgbClr val="E8F4F3"/>
+                </a:solidFill>
+              </a:rPr>
+              <a:t>of parents
+BANNED social media
+entirely for their child</a:t>
+            </a:r>
+          </a:p>
+        </p:txBody>
+      </p:sp>
+      <p:sp>
+        <p:nvSpPr>
+          <p:cNvPr id="12" name="Rounded Rectangle 11"/>
+          <p:cNvSpPr/>
+          <p:nvPr/>
+        </p:nvSpPr>
+        <p:spPr>
+          <a:xfrm>
+            <a:off x="3246120" y="2514600"/>
+            <a:ext cx="2560320" cy="2834640"/>
+          </a:xfrm>
+          <a:prstGeom prst="roundRect">
+            <a:avLst/>
+          </a:prstGeom>
+          <a:solidFill>
+            <a:srgbClr val="063538"/>
+          </a:solidFill>
+          <a:ln>
+            <a:noFill/>
+          </a:ln>
+        </p:spPr>
+        <p:style>
+          <a:lnRef idx="1">
+            <a:schemeClr val="accent1"/>
+          </a:lnRef>
+          <a:fillRef idx="3">
+            <a:schemeClr val="accent1"/>
+          </a:fillRef>
+          <a:effectRef idx="2">
+            <a:schemeClr val="accent1"/>
+          </a:effectRef>
+          <a:fontRef idx="minor">
+            <a:schemeClr val="lt1"/>
+          </a:fontRef>
+        </p:style>
+        <p:txBody>
+          <a:bodyPr rtlCol="0" anchor="ctr"/>
+          <a:lstStyle/>
+          <a:p>
+            <a:pPr algn="ctr"/>
+          </a:p>
+        </p:txBody>
+      </p:sp>
+      <p:sp>
+        <p:nvSpPr>
+          <p:cNvPr id="13" name="Rectangle 12"/>
+          <p:cNvSpPr/>
+          <p:nvPr/>
+        </p:nvSpPr>
+        <p:spPr>
+          <a:xfrm>
+            <a:off x="3246120" y="2514600"/>
+            <a:ext cx="2560320" cy="45720"/>
+          </a:xfrm>
+          <a:prstGeom prst="rect">
+            <a:avLst/>
+          </a:prstGeom>
+          <a:solidFill>
+            <a:srgbClr val="4CC8C3"/>
+          </a:solidFill>
+          <a:ln>
+            <a:noFill/>
+          </a:ln>
+        </p:spPr>
+        <p:style>
+          <a:lnRef idx="1">
+            <a:schemeClr val="accent1"/>
+          </a:lnRef>
+          <a:fillRef idx="3">
+            <a:schemeClr val="accent1"/>
+          </a:fillRef>
+          <a:effectRef idx="2">
+            <a:schemeClr val="accent1"/>
+          </a:effectRef>
+          <a:fontRef idx="minor">
+            <a:schemeClr val="lt1"/>
+          </a:fontRef>
+        </p:style>
+        <p:txBody>
+          <a:bodyPr rtlCol="0" anchor="ctr"/>
+          <a:lstStyle/>
+          <a:p>
+            <a:pPr algn="ctr"/>
+          </a:p>
+        </p:txBody>
+      </p:sp>
+      <p:sp>
+        <p:nvSpPr>
+          <p:cNvPr id="14" name="TextBox 13"/>
+          <p:cNvSpPr txBox="1"/>
+          <p:nvPr/>
+        </p:nvSpPr>
+        <p:spPr>
+          <a:xfrm>
+            <a:off x="3337560" y="2651760"/>
+            <a:ext cx="2377440" cy="777240"/>
+          </a:xfrm>
+          <a:prstGeom prst="rect">
+            <a:avLst/>
+          </a:prstGeom>
+          <a:noFill/>
+        </p:spPr>
+        <p:txBody>
+          <a:bodyPr wrap="square">
+            <a:spAutoFit/>
+          </a:bodyPr>
+          <a:lstStyle/>
+          <a:p>
+            <a:pPr algn="l"/>
+            <a:r>
+              <a:rPr sz="3600" b="1" i="0">
+                <a:solidFill>
+                  <a:srgbClr val="4CC8C3"/>
+                </a:solidFill>
+              </a:rPr>
+              <a:t>38%</a:t>
+            </a:r>
+          </a:p>
+        </p:txBody>
+      </p:sp>
+      <p:sp>
+        <p:nvSpPr>
+          <p:cNvPr id="15" name="TextBox 14"/>
+          <p:cNvSpPr txBox="1"/>
+          <p:nvPr/>
+        </p:nvSpPr>
+        <p:spPr>
+          <a:xfrm>
+            <a:off x="3337560" y="3429000"/>
+            <a:ext cx="2377440" cy="1737360"/>
+          </a:xfrm>
+          <a:prstGeom prst="rect">
+            <a:avLst/>
+          </a:prstGeom>
+          <a:noFill/>
+        </p:spPr>
+        <p:txBody>
+          <a:bodyPr wrap="square">
+            <a:spAutoFit/>
+          </a:bodyPr>
+          <a:lstStyle/>
+          <a:p>
+            <a:pPr algn="l"/>
+            <a:r>
+              <a:rPr sz="1200" b="0" i="0">
+                <a:solidFill>
+                  <a:srgbClr val="E8F4F3"/>
+                </a:solidFill>
+              </a:rPr>
+              <a:t>allow it with
+some restrictions,
+but worry constantly</a:t>
+            </a:r>
+          </a:p>
+        </p:txBody>
+      </p:sp>
+      <p:sp>
+        <p:nvSpPr>
+          <p:cNvPr id="16" name="Rounded Rectangle 15"/>
+          <p:cNvSpPr/>
+          <p:nvPr/>
+        </p:nvSpPr>
+        <p:spPr>
+          <a:xfrm>
+            <a:off x="6035040" y="2514600"/>
+            <a:ext cx="2560320" cy="2834640"/>
+          </a:xfrm>
+          <a:prstGeom prst="roundRect">
+            <a:avLst/>
+          </a:prstGeom>
+          <a:solidFill>
+            <a:srgbClr val="063538"/>
+          </a:solidFill>
+          <a:ln>
+            <a:noFill/>
+          </a:ln>
+        </p:spPr>
+        <p:style>
+          <a:lnRef idx="1">
+            <a:schemeClr val="accent1"/>
+          </a:lnRef>
+          <a:fillRef idx="3">
+            <a:schemeClr val="accent1"/>
+          </a:fillRef>
+          <a:effectRef idx="2">
+            <a:schemeClr val="accent1"/>
+          </a:effectRef>
+          <a:fontRef idx="minor">
+            <a:schemeClr val="lt1"/>
+          </a:fontRef>
+        </p:style>
+        <p:txBody>
+          <a:bodyPr rtlCol="0" anchor="ctr"/>
+          <a:lstStyle/>
+          <a:p>
+            <a:pPr algn="ctr"/>
+          </a:p>
+        </p:txBody>
+      </p:sp>
+      <p:sp>
+        <p:nvSpPr>
+          <p:cNvPr id="17" name="Rectangle 16"/>
+          <p:cNvSpPr/>
+          <p:nvPr/>
+        </p:nvSpPr>
+        <p:spPr>
+          <a:xfrm>
+            <a:off x="6035040" y="2514600"/>
+            <a:ext cx="2560320" cy="45720"/>
+          </a:xfrm>
+          <a:prstGeom prst="rect">
+            <a:avLst/>
+          </a:prstGeom>
+          <a:solidFill>
+            <a:srgbClr val="4CC8C3"/>
+          </a:solidFill>
+          <a:ln>
+            <a:noFill/>
+          </a:ln>
+        </p:spPr>
+        <p:style>
+          <a:lnRef idx="1">
+            <a:schemeClr val="accent1"/>
+          </a:lnRef>
+          <a:fillRef idx="3">
+            <a:schemeClr val="accent1"/>
+          </a:fillRef>
+          <a:effectRef idx="2">
+            <a:schemeClr val="accent1"/>
+          </a:effectRef>
+          <a:fontRef idx="minor">
+            <a:schemeClr val="lt1"/>
+          </a:fontRef>
+        </p:style>
+        <p:txBody>
+          <a:bodyPr rtlCol="0" anchor="ctr"/>
+          <a:lstStyle/>
+          <a:p>
+            <a:pPr algn="ctr"/>
+          </a:p>
+        </p:txBody>
+      </p:sp>
+      <p:sp>
+        <p:nvSpPr>
+          <p:cNvPr id="18" name="TextBox 17"/>
+          <p:cNvSpPr txBox="1"/>
+          <p:nvPr/>
+        </p:nvSpPr>
+        <p:spPr>
+          <a:xfrm>
+            <a:off x="6126479" y="2651760"/>
+            <a:ext cx="2377440" cy="777240"/>
+          </a:xfrm>
+          <a:prstGeom prst="rect">
+            <a:avLst/>
+          </a:prstGeom>
+          <a:noFill/>
+        </p:spPr>
+        <p:txBody>
+          <a:bodyPr wrap="square">
+            <a:spAutoFit/>
+          </a:bodyPr>
+          <a:lstStyle/>
+          <a:p>
+            <a:pPr algn="l"/>
+            <a:r>
+              <a:rPr sz="3600" b="1" i="0">
+                <a:solidFill>
+                  <a:srgbClr val="4CC8C3"/>
+                </a:solidFill>
+              </a:rPr>
+              <a:t>72%</a:t>
+            </a:r>
+          </a:p>
+        </p:txBody>
+      </p:sp>
+      <p:sp>
+        <p:nvSpPr>
+          <p:cNvPr id="19" name="TextBox 18"/>
+          <p:cNvSpPr txBox="1"/>
+          <p:nvPr/>
+        </p:nvSpPr>
+        <p:spPr>
+          <a:xfrm>
+            <a:off x="6126479" y="3429000"/>
+            <a:ext cx="2377440" cy="1737360"/>
+          </a:xfrm>
+          <a:prstGeom prst="rect">
+            <a:avLst/>
+          </a:prstGeom>
+          <a:noFill/>
+        </p:spPr>
+        <p:txBody>
+          <a:bodyPr wrap="square">
+            <a:spAutoFit/>
+          </a:bodyPr>
+          <a:lstStyle/>
+          <a:p>
+            <a:pPr algn="l"/>
+            <a:r>
+              <a:rPr sz="1200" b="0" i="0">
+                <a:solidFill>
+                  <a:srgbClr val="E8F4F3"/>
+                </a:solidFill>
+              </a:rPr>
+              <a:t>of kids say they feel
+"left out" because they
+cannot use social apps</a:t>
+            </a:r>
+          </a:p>
+        </p:txBody>
+      </p:sp>
+      <p:sp>
+        <p:nvSpPr>
+          <p:cNvPr id="20" name="Rounded Rectangle 19"/>
+          <p:cNvSpPr/>
+          <p:nvPr/>
+        </p:nvSpPr>
+        <p:spPr>
+          <a:xfrm>
+            <a:off x="8823959" y="2514600"/>
+            <a:ext cx="2560320" cy="2834640"/>
+          </a:xfrm>
+          <a:prstGeom prst="roundRect">
+            <a:avLst/>
+          </a:prstGeom>
+          <a:solidFill>
+            <a:srgbClr val="063538"/>
+          </a:solidFill>
+          <a:ln>
+            <a:noFill/>
+          </a:ln>
+        </p:spPr>
+        <p:style>
+          <a:lnRef idx="1">
+            <a:schemeClr val="accent1"/>
+          </a:lnRef>
+          <a:fillRef idx="3">
+            <a:schemeClr val="accent1"/>
+          </a:fillRef>
+          <a:effectRef idx="2">
+            <a:schemeClr val="accent1"/>
+          </a:effectRef>
+          <a:fontRef idx="minor">
+            <a:schemeClr val="lt1"/>
+          </a:fontRef>
+        </p:style>
+        <p:txBody>
+          <a:bodyPr rtlCol="0" anchor="ctr"/>
+          <a:lstStyle/>
+          <a:p>
+            <a:pPr algn="ctr"/>
+          </a:p>
+        </p:txBody>
+      </p:sp>
+      <p:sp>
+        <p:nvSpPr>
+          <p:cNvPr id="21" name="Rectangle 20"/>
+          <p:cNvSpPr/>
+          <p:nvPr/>
+        </p:nvSpPr>
+        <p:spPr>
+          <a:xfrm>
+            <a:off x="8823959" y="2514600"/>
+            <a:ext cx="2560320" cy="45720"/>
+          </a:xfrm>
+          <a:prstGeom prst="rect">
+            <a:avLst/>
+          </a:prstGeom>
+          <a:solidFill>
+            <a:srgbClr val="4CC8C3"/>
+          </a:solidFill>
+          <a:ln>
+            <a:noFill/>
+          </a:ln>
+        </p:spPr>
+        <p:style>
+          <a:lnRef idx="1">
+            <a:schemeClr val="accent1"/>
+          </a:lnRef>
+          <a:fillRef idx="3">
+            <a:schemeClr val="accent1"/>
+          </a:fillRef>
+          <a:effectRef idx="2">
+            <a:schemeClr val="accent1"/>
+          </a:effectRef>
+          <a:fontRef idx="minor">
+            <a:schemeClr val="lt1"/>
+          </a:fontRef>
+        </p:style>
+        <p:txBody>
+          <a:bodyPr rtlCol="0" anchor="ctr"/>
+          <a:lstStyle/>
+          <a:p>
+            <a:pPr algn="ctr"/>
+          </a:p>
+        </p:txBody>
+      </p:sp>
+      <p:sp>
+        <p:nvSpPr>
+          <p:cNvPr id="22" name="TextBox 21"/>
+          <p:cNvSpPr txBox="1"/>
+          <p:nvPr/>
+        </p:nvSpPr>
+        <p:spPr>
+          <a:xfrm>
+            <a:off x="8915399" y="2651760"/>
+            <a:ext cx="2377440" cy="777240"/>
+          </a:xfrm>
+          <a:prstGeom prst="rect">
+            <a:avLst/>
+          </a:prstGeom>
+          <a:noFill/>
+        </p:spPr>
+        <p:txBody>
+          <a:bodyPr wrap="square">
+            <a:spAutoFit/>
+          </a:bodyPr>
+          <a:lstStyle/>
+          <a:p>
+            <a:pPr algn="l"/>
+            <a:r>
+              <a:rPr sz="3600" b="1" i="0">
+                <a:solidFill>
+                  <a:srgbClr val="4CC8C3"/>
+                </a:solidFill>
+              </a:rPr>
+              <a:t>91%</a:t>
+            </a:r>
+          </a:p>
+        </p:txBody>
+      </p:sp>
+      <p:sp>
+        <p:nvSpPr>
+          <p:cNvPr id="23" name="TextBox 22"/>
+          <p:cNvSpPr txBox="1"/>
+          <p:nvPr/>
+        </p:nvSpPr>
+        <p:spPr>
+          <a:xfrm>
+            <a:off x="8915399" y="3429000"/>
+            <a:ext cx="2377440" cy="1737360"/>
+          </a:xfrm>
+          <a:prstGeom prst="rect">
+            <a:avLst/>
+          </a:prstGeom>
+          <a:noFill/>
+        </p:spPr>
+        <p:txBody>
+          <a:bodyPr wrap="square">
+            <a:spAutoFit/>
+          </a:bodyPr>
+          <a:lstStyle/>
+          <a:p>
+            <a:pPr algn="l"/>
+            <a:r>
+              <a:rPr sz="1200" b="0" i="0">
+                <a:solidFill>
+                  <a:srgbClr val="E8F4F3"/>
+                </a:solidFill>
+              </a:rPr>
+              <a:t>of parents agree
+a 100% safe kid-only
+platform would earn
+their full approval</a:t>
+            </a:r>
+          </a:p>
+        </p:txBody>
+      </p:sp>
+      <p:sp>
+        <p:nvSpPr>
+          <p:cNvPr id="24" name="Rectangle 23"/>
+          <p:cNvSpPr/>
+          <p:nvPr/>
+        </p:nvSpPr>
+        <p:spPr>
+          <a:xfrm>
+            <a:off x="457200" y="5669280"/>
+            <a:ext cx="54864" cy="822960"/>
+          </a:xfrm>
+          <a:prstGeom prst="rect">
+            <a:avLst/>
+          </a:prstGeom>
+          <a:solidFill>
+            <a:srgbClr val="4CC8C3"/>
+          </a:solidFill>
+          <a:ln>
+            <a:noFill/>
+          </a:ln>
+        </p:spPr>
+        <p:style>
+          <a:lnRef idx="1">
+            <a:schemeClr val="accent1"/>
+          </a:lnRef>
+          <a:fillRef idx="3">
+            <a:schemeClr val="accent1"/>
+          </a:fillRef>
+          <a:effectRef idx="2">
+            <a:schemeClr val="accent1"/>
+          </a:effectRef>
+          <a:fontRef idx="minor">
+            <a:schemeClr val="lt1"/>
+          </a:fontRef>
+        </p:style>
+        <p:txBody>
+          <a:bodyPr rtlCol="0" anchor="ctr"/>
+          <a:lstStyle/>
+          <a:p>
+            <a:pPr algn="ctr"/>
+          </a:p>
+        </p:txBody>
+      </p:sp>
+      <p:sp>
+        <p:nvSpPr>
+          <p:cNvPr id="25" name="TextBox 24"/>
+          <p:cNvSpPr txBox="1"/>
+          <p:nvPr/>
+        </p:nvSpPr>
+        <p:spPr>
+          <a:xfrm>
+            <a:off x="685800" y="5687568"/>
+            <a:ext cx="10789920" cy="685800"/>
+          </a:xfrm>
+          <a:prstGeom prst="rect">
+            <a:avLst/>
+          </a:prstGeom>
+          <a:noFill/>
+        </p:spPr>
+        <p:txBody>
+          <a:bodyPr wrap="square">
+            <a:spAutoFit/>
+          </a:bodyPr>
+          <a:lstStyle/>
+          <a:p>
+            <a:pPr algn="l"/>
+            <a:r>
+              <a:rPr sz="1400" b="0" i="1">
+                <a:solidFill>
+                  <a:srgbClr val="E8F4F3"/>
+                </a:solidFill>
+              </a:rPr>
+              <a:t>"I don't want to ban social media forever. I just want something I can actually trust with my 9-year-old."  — Parent focus group respondent</a:t>
+            </a:r>
+          </a:p>
+        </p:txBody>
+      </p:sp>
+    </p:spTree>
+  </p:cSld>
+  <p:clrMapOvr>
+    <a:masterClrMapping/>
+  </p:clrMapOvr>
+</p:sld>
+</file>
+
+<file path=ppt/slides/slide18.xml><?xml version="1.0" encoding="utf-8"?>
+<p:sld xmlns:a="http://schemas.openxmlformats.org/drawingml/2006/main" xmlns:p="http://schemas.openxmlformats.org/presentationml/2006/main" xmlns:r="http://schemas.openxmlformats.org/officeDocument/2006/relationships">
+  <p:cSld>
+    <p:bg>
+      <p:bgPr>
+        <a:solidFill>
+          <a:srgbClr val="0D2C2C"/>
+        </a:solidFill>
+        <a:effectLst/>
+      </p:bgPr>
+    </p:bg>
+    <p:spTree>
+      <p:nvGrpSpPr>
+        <p:cNvPr id="1" name=""/>
+        <p:cNvGrpSpPr/>
+        <p:nvPr/>
+      </p:nvGrpSpPr>
+      <p:grpSpPr/>
+      <p:sp>
+        <p:nvSpPr>
+          <p:cNvPr id="2" name="Rectangle 1"/>
+          <p:cNvSpPr/>
+          <p:nvPr/>
+        </p:nvSpPr>
+        <p:spPr>
+          <a:xfrm>
+            <a:off x="0" y="73152"/>
+            <a:ext cx="12188952" cy="54864"/>
+          </a:xfrm>
+          <a:prstGeom prst="rect">
+            <a:avLst/>
+          </a:prstGeom>
+          <a:solidFill>
+            <a:srgbClr val="4CC8C3"/>
+          </a:solidFill>
+          <a:ln>
+            <a:noFill/>
+          </a:ln>
+        </p:spPr>
+        <p:style>
+          <a:lnRef idx="1">
+            <a:schemeClr val="accent1"/>
+          </a:lnRef>
+          <a:fillRef idx="3">
+            <a:schemeClr val="accent1"/>
+          </a:fillRef>
+          <a:effectRef idx="2">
+            <a:schemeClr val="accent1"/>
+          </a:effectRef>
+          <a:fontRef idx="minor">
+            <a:schemeClr val="lt1"/>
+          </a:fontRef>
+        </p:style>
+        <p:txBody>
+          <a:bodyPr rtlCol="0" anchor="ctr"/>
+          <a:lstStyle/>
+          <a:p>
+            <a:pPr algn="ctr"/>
+          </a:p>
+        </p:txBody>
+      </p:sp>
+      <p:sp>
+        <p:nvSpPr>
+          <p:cNvPr id="3" name="TextBox 2"/>
+          <p:cNvSpPr txBox="1"/>
+          <p:nvPr/>
+        </p:nvSpPr>
+        <p:spPr>
+          <a:xfrm>
+            <a:off x="457200" y="502920"/>
+            <a:ext cx="4572000" cy="365760"/>
+          </a:xfrm>
+          <a:prstGeom prst="rect">
+            <a:avLst/>
+          </a:prstGeom>
+          <a:noFill/>
+        </p:spPr>
+        <p:txBody>
+          <a:bodyPr wrap="square">
+            <a:spAutoFit/>
+          </a:bodyPr>
+          <a:lstStyle/>
+          <a:p>
+            <a:pPr algn="l"/>
+            <a:r>
+              <a:rPr sz="1050" b="1" i="0">
+                <a:solidFill>
+                  <a:srgbClr val="4CC8C3"/>
+                </a:solidFill>
+              </a:rPr>
+              <a:t>THE SAFE SOCIAL SOLUTION</a:t>
+            </a:r>
+          </a:p>
+        </p:txBody>
+      </p:sp>
+      <p:sp>
+        <p:nvSpPr>
+          <p:cNvPr id="4" name="TextBox 3"/>
+          <p:cNvSpPr txBox="1"/>
+          <p:nvPr/>
+        </p:nvSpPr>
+        <p:spPr>
+          <a:xfrm>
+            <a:off x="11640312" y="6492240"/>
+            <a:ext cx="365760" cy="274320"/>
+          </a:xfrm>
+          <a:prstGeom prst="rect">
+            <a:avLst/>
+          </a:prstGeom>
+          <a:noFill/>
+        </p:spPr>
+        <p:txBody>
+          <a:bodyPr wrap="square">
+            <a:spAutoFit/>
+          </a:bodyPr>
+          <a:lstStyle/>
+          <a:p>
+            <a:pPr algn="r"/>
+            <a:r>
+              <a:rPr sz="950" b="0" i="0">
+                <a:solidFill>
+                  <a:srgbClr val="88AAA8"/>
+                </a:solidFill>
+              </a:rPr>
+              <a:t>18</a:t>
+            </a:r>
+          </a:p>
+        </p:txBody>
+      </p:sp>
+      <p:sp>
+        <p:nvSpPr>
+          <p:cNvPr id="5" name="TextBox 4"/>
+          <p:cNvSpPr txBox="1"/>
+          <p:nvPr/>
+        </p:nvSpPr>
+        <p:spPr>
+          <a:xfrm>
+            <a:off x="457200" y="914400"/>
+            <a:ext cx="8229600" cy="822960"/>
+          </a:xfrm>
+          <a:prstGeom prst="rect">
+            <a:avLst/>
+          </a:prstGeom>
+          <a:noFill/>
+        </p:spPr>
+        <p:txBody>
+          <a:bodyPr wrap="square">
+            <a:spAutoFit/>
+          </a:bodyPr>
+          <a:lstStyle/>
+          <a:p>
+            <a:pPr algn="l"/>
+            <a:r>
+              <a:rPr sz="3000" b="1" i="0">
+                <a:solidFill>
+                  <a:srgbClr val="FFFFFF"/>
+                </a:solidFill>
+              </a:rPr>
+              <a:t>What If Social Media Was Built
+For Kids First?</a:t>
+            </a:r>
+          </a:p>
+        </p:txBody>
+      </p:sp>
+      <p:sp>
+        <p:nvSpPr>
+          <p:cNvPr id="6" name="Rectangle 5"/>
+          <p:cNvSpPr/>
+          <p:nvPr/>
+        </p:nvSpPr>
+        <p:spPr>
+          <a:xfrm>
+            <a:off x="457200" y="1828800"/>
+            <a:ext cx="4572000" cy="45720"/>
+          </a:xfrm>
+          <a:prstGeom prst="rect">
+            <a:avLst/>
+          </a:prstGeom>
+          <a:solidFill>
+            <a:srgbClr val="4CC8C3"/>
+          </a:solidFill>
+          <a:ln>
+            <a:noFill/>
+          </a:ln>
+        </p:spPr>
+        <p:style>
+          <a:lnRef idx="1">
+            <a:schemeClr val="accent1"/>
+          </a:lnRef>
+          <a:fillRef idx="3">
+            <a:schemeClr val="accent1"/>
+          </a:fillRef>
+          <a:effectRef idx="2">
+            <a:schemeClr val="accent1"/>
+          </a:effectRef>
+          <a:fontRef idx="minor">
+            <a:schemeClr val="lt1"/>
+          </a:fontRef>
+        </p:style>
+        <p:txBody>
+          <a:bodyPr rtlCol="0" anchor="ctr"/>
+          <a:lstStyle/>
+          <a:p>
+            <a:pPr algn="ctr"/>
+          </a:p>
+        </p:txBody>
+      </p:sp>
+      <p:sp>
+        <p:nvSpPr>
+          <p:cNvPr id="7" name="TextBox 6"/>
+          <p:cNvSpPr txBox="1"/>
+          <p:nvPr/>
+        </p:nvSpPr>
+        <p:spPr>
+          <a:xfrm>
+            <a:off x="457200" y="1965960"/>
+            <a:ext cx="10972800" cy="457200"/>
+          </a:xfrm>
+          <a:prstGeom prst="rect">
+            <a:avLst/>
+          </a:prstGeom>
+          <a:noFill/>
+        </p:spPr>
+        <p:txBody>
+          <a:bodyPr wrap="square">
+            <a:spAutoFit/>
+          </a:bodyPr>
+          <a:lstStyle/>
+          <a:p>
+            <a:pPr algn="l"/>
+            <a:r>
+              <a:rPr sz="1500" b="0" i="1">
+                <a:solidFill>
+                  <a:srgbClr val="A0E1DF"/>
+                </a:solidFill>
+              </a:rPr>
+              <a:t>A 100% kid-safe social layer — built into Tiny Masterpieces — gives kids the status of social media, with zero of the risk.</a:t>
+            </a:r>
+          </a:p>
+        </p:txBody>
+      </p:sp>
+      <p:sp>
+        <p:nvSpPr>
+          <p:cNvPr id="8" name="Rounded Rectangle 7"/>
+          <p:cNvSpPr/>
+          <p:nvPr/>
+        </p:nvSpPr>
+        <p:spPr>
+          <a:xfrm>
+            <a:off x="457200" y="2606040"/>
+            <a:ext cx="5212080" cy="3520440"/>
+          </a:xfrm>
+          <a:prstGeom prst="roundRect">
+            <a:avLst/>
+          </a:prstGeom>
+          <a:solidFill>
+            <a:srgbClr val="063538"/>
+          </a:solidFill>
+          <a:ln>
+            <a:noFill/>
+          </a:ln>
+        </p:spPr>
+        <p:style>
+          <a:lnRef idx="1">
+            <a:schemeClr val="accent1"/>
+          </a:lnRef>
+          <a:fillRef idx="3">
+            <a:schemeClr val="accent1"/>
+          </a:fillRef>
+          <a:effectRef idx="2">
+            <a:schemeClr val="accent1"/>
+          </a:effectRef>
+          <a:fontRef idx="minor">
+            <a:schemeClr val="lt1"/>
+          </a:fontRef>
+        </p:style>
+        <p:txBody>
+          <a:bodyPr rtlCol="0" anchor="ctr"/>
+          <a:lstStyle/>
+          <a:p>
+            <a:pPr algn="ctr"/>
+          </a:p>
+        </p:txBody>
+      </p:sp>
+      <p:sp>
+        <p:nvSpPr>
+          <p:cNvPr id="9" name="Rectangle 8"/>
+          <p:cNvSpPr/>
+          <p:nvPr/>
+        </p:nvSpPr>
+        <p:spPr>
+          <a:xfrm>
+            <a:off x="457200" y="2606040"/>
+            <a:ext cx="5212080" cy="45720"/>
+          </a:xfrm>
+          <a:prstGeom prst="rect">
+            <a:avLst/>
+          </a:prstGeom>
+          <a:solidFill>
+            <a:srgbClr val="4CC8C3"/>
+          </a:solidFill>
+          <a:ln>
+            <a:noFill/>
+          </a:ln>
+        </p:spPr>
+        <p:style>
+          <a:lnRef idx="1">
+            <a:schemeClr val="accent1"/>
+          </a:lnRef>
+          <a:fillRef idx="3">
+            <a:schemeClr val="accent1"/>
+          </a:fillRef>
+          <a:effectRef idx="2">
+            <a:schemeClr val="accent1"/>
+          </a:effectRef>
+          <a:fontRef idx="minor">
+            <a:schemeClr val="lt1"/>
+          </a:fontRef>
+        </p:style>
+        <p:txBody>
+          <a:bodyPr rtlCol="0" anchor="ctr"/>
+          <a:lstStyle/>
+          <a:p>
+            <a:pPr algn="ctr"/>
+          </a:p>
+        </p:txBody>
+      </p:sp>
+      <p:sp>
+        <p:nvSpPr>
+          <p:cNvPr id="10" name="TextBox 9"/>
+          <p:cNvSpPr txBox="1"/>
+          <p:nvPr/>
+        </p:nvSpPr>
+        <p:spPr>
+          <a:xfrm>
+            <a:off x="594360" y="2697480"/>
+            <a:ext cx="4114800" cy="365760"/>
+          </a:xfrm>
+          <a:prstGeom prst="rect">
+            <a:avLst/>
+          </a:prstGeom>
+          <a:noFill/>
+        </p:spPr>
+        <p:txBody>
+          <a:bodyPr wrap="square">
+            <a:spAutoFit/>
+          </a:bodyPr>
+          <a:lstStyle/>
+          <a:p>
+            <a:pPr algn="l"/>
+            <a:r>
+              <a:rPr sz="1100" b="1" i="0">
+                <a:solidFill>
+                  <a:srgbClr val="4CC8C3"/>
+                </a:solidFill>
+              </a:rPr>
+              <a:t>HOW IT STAYS SAFE</a:t>
+            </a:r>
+          </a:p>
+        </p:txBody>
+      </p:sp>
+      <p:sp>
+        <p:nvSpPr>
+          <p:cNvPr id="11" name="TextBox 10"/>
+          <p:cNvSpPr txBox="1"/>
+          <p:nvPr/>
+        </p:nvSpPr>
+        <p:spPr>
+          <a:xfrm>
+            <a:off x="594360" y="3127248"/>
+            <a:ext cx="365760" cy="347472"/>
+          </a:xfrm>
+          <a:prstGeom prst="rect">
+            <a:avLst/>
+          </a:prstGeom>
+          <a:noFill/>
+        </p:spPr>
+        <p:txBody>
+          <a:bodyPr wrap="square">
+            <a:spAutoFit/>
+          </a:bodyPr>
+          <a:lstStyle/>
+          <a:p>
+            <a:pPr algn="l"/>
+            <a:r>
+              <a:rPr sz="1100" b="0" i="0">
+                <a:solidFill>
+                  <a:srgbClr val="FFFFFF"/>
+                </a:solidFill>
+              </a:rPr>
+              <a:t>🔒</a:t>
+            </a:r>
+          </a:p>
+        </p:txBody>
+      </p:sp>
+      <p:sp>
+        <p:nvSpPr>
+          <p:cNvPr id="12" name="TextBox 11"/>
+          <p:cNvSpPr txBox="1"/>
+          <p:nvPr/>
+        </p:nvSpPr>
+        <p:spPr>
+          <a:xfrm>
+            <a:off x="1005840" y="3145536"/>
+            <a:ext cx="4572000" cy="347472"/>
+          </a:xfrm>
+          <a:prstGeom prst="rect">
+            <a:avLst/>
+          </a:prstGeom>
+          <a:noFill/>
+        </p:spPr>
+        <p:txBody>
+          <a:bodyPr wrap="square">
+            <a:spAutoFit/>
+          </a:bodyPr>
+          <a:lstStyle/>
+          <a:p>
+            <a:pPr algn="l"/>
+            <a:r>
+              <a:rPr sz="1100" b="0" i="0">
+                <a:solidFill>
+                  <a:srgbClr val="E8F4F3"/>
+                </a:solidFill>
+              </a:rPr>
+              <a:t>Closed community — only verified families</a:t>
+            </a:r>
+          </a:p>
+        </p:txBody>
+      </p:sp>
+      <p:sp>
+        <p:nvSpPr>
+          <p:cNvPr id="13" name="TextBox 12"/>
+          <p:cNvSpPr txBox="1"/>
+          <p:nvPr/>
+        </p:nvSpPr>
+        <p:spPr>
+          <a:xfrm>
+            <a:off x="594360" y="3547872"/>
+            <a:ext cx="365760" cy="347472"/>
+          </a:xfrm>
+          <a:prstGeom prst="rect">
+            <a:avLst/>
+          </a:prstGeom>
+          <a:noFill/>
+        </p:spPr>
+        <p:txBody>
+          <a:bodyPr wrap="square">
+            <a:spAutoFit/>
+          </a:bodyPr>
+          <a:lstStyle/>
+          <a:p>
+            <a:pPr algn="l"/>
+            <a:r>
+              <a:rPr sz="1100" b="0" i="0">
+                <a:solidFill>
+                  <a:srgbClr val="FFFFFF"/>
+                </a:solidFill>
+              </a:rPr>
+              <a:t>🚫</a:t>
+            </a:r>
+          </a:p>
+        </p:txBody>
+      </p:sp>
+      <p:sp>
+        <p:nvSpPr>
+          <p:cNvPr id="14" name="TextBox 13"/>
+          <p:cNvSpPr txBox="1"/>
+          <p:nvPr/>
+        </p:nvSpPr>
+        <p:spPr>
+          <a:xfrm>
+            <a:off x="1005840" y="3566160"/>
+            <a:ext cx="4572000" cy="347472"/>
+          </a:xfrm>
+          <a:prstGeom prst="rect">
+            <a:avLst/>
+          </a:prstGeom>
+          <a:noFill/>
+        </p:spPr>
+        <p:txBody>
+          <a:bodyPr wrap="square">
+            <a:spAutoFit/>
+          </a:bodyPr>
+          <a:lstStyle/>
+          <a:p>
+            <a:pPr algn="l"/>
+            <a:r>
+              <a:rPr sz="1100" b="0" i="0">
+                <a:solidFill>
+                  <a:srgbClr val="E8F4F3"/>
+                </a:solidFill>
+              </a:rPr>
+              <a:t>No DMs, no open comments, no strangers</a:t>
+            </a:r>
+          </a:p>
+        </p:txBody>
+      </p:sp>
+      <p:sp>
+        <p:nvSpPr>
+          <p:cNvPr id="15" name="TextBox 14"/>
+          <p:cNvSpPr txBox="1"/>
+          <p:nvPr/>
+        </p:nvSpPr>
+        <p:spPr>
+          <a:xfrm>
+            <a:off x="594360" y="3968496"/>
+            <a:ext cx="365760" cy="347472"/>
+          </a:xfrm>
+          <a:prstGeom prst="rect">
+            <a:avLst/>
+          </a:prstGeom>
+          <a:noFill/>
+        </p:spPr>
+        <p:txBody>
+          <a:bodyPr wrap="square">
+            <a:spAutoFit/>
+          </a:bodyPr>
+          <a:lstStyle/>
+          <a:p>
+            <a:pPr algn="l"/>
+            <a:r>
+              <a:rPr sz="1100" b="0" i="0">
+                <a:solidFill>
+                  <a:srgbClr val="FFFFFF"/>
+                </a:solidFill>
+              </a:rPr>
+              <a:t>✅</a:t>
+            </a:r>
+          </a:p>
+        </p:txBody>
+      </p:sp>
+      <p:sp>
+        <p:nvSpPr>
+          <p:cNvPr id="16" name="TextBox 15"/>
+          <p:cNvSpPr txBox="1"/>
+          <p:nvPr/>
+        </p:nvSpPr>
+        <p:spPr>
+          <a:xfrm>
+            <a:off x="1005840" y="3986783"/>
+            <a:ext cx="4572000" cy="347472"/>
+          </a:xfrm>
+          <a:prstGeom prst="rect">
+            <a:avLst/>
+          </a:prstGeom>
+          <a:noFill/>
+        </p:spPr>
+        <p:txBody>
+          <a:bodyPr wrap="square">
+            <a:spAutoFit/>
+          </a:bodyPr>
+          <a:lstStyle/>
+          <a:p>
+            <a:pPr algn="l"/>
+            <a:r>
+              <a:rPr sz="1100" b="0" i="0">
+                <a:solidFill>
+                  <a:srgbClr val="E8F4F3"/>
+                </a:solidFill>
+              </a:rPr>
+              <a:t>Every post parent-approved before publishing</a:t>
+            </a:r>
+          </a:p>
+        </p:txBody>
+      </p:sp>
+      <p:sp>
+        <p:nvSpPr>
+          <p:cNvPr id="17" name="TextBox 16"/>
+          <p:cNvSpPr txBox="1"/>
+          <p:nvPr/>
+        </p:nvSpPr>
+        <p:spPr>
+          <a:xfrm>
+            <a:off x="594360" y="4389120"/>
+            <a:ext cx="365760" cy="347472"/>
+          </a:xfrm>
+          <a:prstGeom prst="rect">
+            <a:avLst/>
+          </a:prstGeom>
+          <a:noFill/>
+        </p:spPr>
+        <p:txBody>
+          <a:bodyPr wrap="square">
+            <a:spAutoFit/>
+          </a:bodyPr>
+          <a:lstStyle/>
+          <a:p>
+            <a:pPr algn="l"/>
+            <a:r>
+              <a:rPr sz="1100" b="0" i="0">
+                <a:solidFill>
+                  <a:srgbClr val="FFFFFF"/>
+                </a:solidFill>
+              </a:rPr>
+              <a:t>👁️</a:t>
+            </a:r>
+          </a:p>
+        </p:txBody>
+      </p:sp>
+      <p:sp>
+        <p:nvSpPr>
+          <p:cNvPr id="18" name="TextBox 17"/>
+          <p:cNvSpPr txBox="1"/>
+          <p:nvPr/>
+        </p:nvSpPr>
+        <p:spPr>
+          <a:xfrm>
+            <a:off x="1005840" y="4407407"/>
+            <a:ext cx="4572000" cy="347472"/>
+          </a:xfrm>
+          <a:prstGeom prst="rect">
+            <a:avLst/>
+          </a:prstGeom>
+          <a:noFill/>
+        </p:spPr>
+        <p:txBody>
+          <a:bodyPr wrap="square">
+            <a:spAutoFit/>
+          </a:bodyPr>
+          <a:lstStyle/>
+          <a:p>
+            <a:pPr algn="l"/>
+            <a:r>
+              <a:rPr sz="1100" b="0" i="0">
+                <a:solidFill>
+                  <a:srgbClr val="E8F4F3"/>
+                </a:solidFill>
+              </a:rPr>
+              <a:t>AI + human moderation on all content</a:t>
+            </a:r>
+          </a:p>
+        </p:txBody>
+      </p:sp>
+      <p:sp>
+        <p:nvSpPr>
+          <p:cNvPr id="19" name="TextBox 18"/>
+          <p:cNvSpPr txBox="1"/>
+          <p:nvPr/>
+        </p:nvSpPr>
+        <p:spPr>
+          <a:xfrm>
+            <a:off x="594360" y="4809744"/>
+            <a:ext cx="365760" cy="347472"/>
+          </a:xfrm>
+          <a:prstGeom prst="rect">
+            <a:avLst/>
+          </a:prstGeom>
+          <a:noFill/>
+        </p:spPr>
+        <p:txBody>
+          <a:bodyPr wrap="square">
+            <a:spAutoFit/>
+          </a:bodyPr>
+          <a:lstStyle/>
+          <a:p>
+            <a:pPr algn="l"/>
+            <a:r>
+              <a:rPr sz="1100" b="0" i="0">
+                <a:solidFill>
+                  <a:srgbClr val="FFFFFF"/>
+                </a:solidFill>
+              </a:rPr>
+              <a:t>🛡️</a:t>
+            </a:r>
+          </a:p>
+        </p:txBody>
+      </p:sp>
+      <p:sp>
+        <p:nvSpPr>
+          <p:cNvPr id="20" name="TextBox 19"/>
+          <p:cNvSpPr txBox="1"/>
+          <p:nvPr/>
+        </p:nvSpPr>
+        <p:spPr>
+          <a:xfrm>
+            <a:off x="1005840" y="4828031"/>
+            <a:ext cx="4572000" cy="347472"/>
+          </a:xfrm>
+          <a:prstGeom prst="rect">
+            <a:avLst/>
+          </a:prstGeom>
+          <a:noFill/>
+        </p:spPr>
+        <p:txBody>
+          <a:bodyPr wrap="square">
+            <a:spAutoFit/>
+          </a:bodyPr>
+          <a:lstStyle/>
+          <a:p>
+            <a:pPr algn="l"/>
+            <a:r>
+              <a:rPr sz="1100" b="0" i="0">
+                <a:solidFill>
+                  <a:srgbClr val="E8F4F3"/>
+                </a:solidFill>
+              </a:rPr>
+              <a:t>COPPA-compliant from day one</a:t>
+            </a:r>
+          </a:p>
+        </p:txBody>
+      </p:sp>
+      <p:sp>
+        <p:nvSpPr>
+          <p:cNvPr id="21" name="TextBox 20"/>
+          <p:cNvSpPr txBox="1"/>
+          <p:nvPr/>
+        </p:nvSpPr>
+        <p:spPr>
+          <a:xfrm>
+            <a:off x="594360" y="5230368"/>
+            <a:ext cx="365760" cy="347472"/>
+          </a:xfrm>
+          <a:prstGeom prst="rect">
+            <a:avLst/>
+          </a:prstGeom>
+          <a:noFill/>
+        </p:spPr>
+        <p:txBody>
+          <a:bodyPr wrap="square">
+            <a:spAutoFit/>
+          </a:bodyPr>
+          <a:lstStyle/>
+          <a:p>
+            <a:pPr algn="l"/>
+            <a:r>
+              <a:rPr sz="1100" b="0" i="0">
+                <a:solidFill>
+                  <a:srgbClr val="FFFFFF"/>
+                </a:solidFill>
+              </a:rPr>
+              <a:t>📵</a:t>
+            </a:r>
+          </a:p>
+        </p:txBody>
+      </p:sp>
+      <p:sp>
+        <p:nvSpPr>
+          <p:cNvPr id="22" name="TextBox 21"/>
+          <p:cNvSpPr txBox="1"/>
+          <p:nvPr/>
+        </p:nvSpPr>
+        <p:spPr>
+          <a:xfrm>
+            <a:off x="1005840" y="5248655"/>
+            <a:ext cx="4572000" cy="347472"/>
+          </a:xfrm>
+          <a:prstGeom prst="rect">
+            <a:avLst/>
+          </a:prstGeom>
+          <a:noFill/>
+        </p:spPr>
+        <p:txBody>
+          <a:bodyPr wrap="square">
+            <a:spAutoFit/>
+          </a:bodyPr>
+          <a:lstStyle/>
+          <a:p>
+            <a:pPr algn="l"/>
+            <a:r>
+              <a:rPr sz="1100" b="0" i="0">
+                <a:solidFill>
+                  <a:srgbClr val="E8F4F3"/>
+                </a:solidFill>
+              </a:rPr>
+              <a:t>No follower counts or like-based ranking</a:t>
+            </a:r>
+          </a:p>
+        </p:txBody>
+      </p:sp>
+      <p:sp>
+        <p:nvSpPr>
+          <p:cNvPr id="23" name="TextBox 22"/>
+          <p:cNvSpPr txBox="1"/>
+          <p:nvPr/>
+        </p:nvSpPr>
+        <p:spPr>
+          <a:xfrm>
+            <a:off x="594360" y="5650992"/>
+            <a:ext cx="365760" cy="347472"/>
+          </a:xfrm>
+          <a:prstGeom prst="rect">
+            <a:avLst/>
+          </a:prstGeom>
+          <a:noFill/>
+        </p:spPr>
+        <p:txBody>
+          <a:bodyPr wrap="square">
+            <a:spAutoFit/>
+          </a:bodyPr>
+          <a:lstStyle/>
+          <a:p>
+            <a:pPr algn="l"/>
+            <a:r>
+              <a:rPr sz="1100" b="0" i="0">
+                <a:solidFill>
+                  <a:srgbClr val="FFFFFF"/>
+                </a:solidFill>
+              </a:rPr>
+              <a:t>🎨</a:t>
+            </a:r>
+          </a:p>
+        </p:txBody>
+      </p:sp>
+      <p:sp>
+        <p:nvSpPr>
+          <p:cNvPr id="24" name="TextBox 23"/>
+          <p:cNvSpPr txBox="1"/>
+          <p:nvPr/>
+        </p:nvSpPr>
+        <p:spPr>
+          <a:xfrm>
+            <a:off x="1005840" y="5669279"/>
+            <a:ext cx="4572000" cy="347472"/>
+          </a:xfrm>
+          <a:prstGeom prst="rect">
+            <a:avLst/>
+          </a:prstGeom>
+          <a:noFill/>
+        </p:spPr>
+        <p:txBody>
+          <a:bodyPr wrap="square">
+            <a:spAutoFit/>
+          </a:bodyPr>
+          <a:lstStyle/>
+          <a:p>
+            <a:pPr algn="l"/>
+            <a:r>
+              <a:rPr sz="1100" b="0" i="0">
+                <a:solidFill>
+                  <a:srgbClr val="E8F4F3"/>
+                </a:solidFill>
+              </a:rPr>
+              <a:t>Art-only feed — creativity, not selfies</a:t>
+            </a:r>
+          </a:p>
+        </p:txBody>
+      </p:sp>
+      <p:sp>
+        <p:nvSpPr>
+          <p:cNvPr id="25" name="Rounded Rectangle 24"/>
+          <p:cNvSpPr/>
+          <p:nvPr/>
+        </p:nvSpPr>
+        <p:spPr>
+          <a:xfrm>
+            <a:off x="6126480" y="2606040"/>
+            <a:ext cx="5212080" cy="3520440"/>
+          </a:xfrm>
+          <a:prstGeom prst="roundRect">
+            <a:avLst/>
+          </a:prstGeom>
+          <a:solidFill>
+            <a:srgbClr val="063538"/>
+          </a:solidFill>
+          <a:ln>
+            <a:noFill/>
+          </a:ln>
+        </p:spPr>
+        <p:style>
+          <a:lnRef idx="1">
+            <a:schemeClr val="accent1"/>
+          </a:lnRef>
+          <a:fillRef idx="3">
+            <a:schemeClr val="accent1"/>
+          </a:fillRef>
+          <a:effectRef idx="2">
+            <a:schemeClr val="accent1"/>
+          </a:effectRef>
+          <a:fontRef idx="minor">
+            <a:schemeClr val="lt1"/>
+          </a:fontRef>
+        </p:style>
+        <p:txBody>
+          <a:bodyPr rtlCol="0" anchor="ctr"/>
+          <a:lstStyle/>
+          <a:p>
+            <a:pPr algn="ctr"/>
+          </a:p>
+        </p:txBody>
+      </p:sp>
+      <p:sp>
+        <p:nvSpPr>
+          <p:cNvPr id="26" name="Rectangle 25"/>
+          <p:cNvSpPr/>
+          <p:nvPr/>
+        </p:nvSpPr>
+        <p:spPr>
+          <a:xfrm>
+            <a:off x="6126480" y="2606040"/>
+            <a:ext cx="5212080" cy="45720"/>
+          </a:xfrm>
+          <a:prstGeom prst="rect">
+            <a:avLst/>
+          </a:prstGeom>
+          <a:solidFill>
+            <a:srgbClr val="F7D060"/>
+          </a:solidFill>
+          <a:ln>
+            <a:noFill/>
+          </a:ln>
+        </p:spPr>
+        <p:style>
+          <a:lnRef idx="1">
+            <a:schemeClr val="accent1"/>
+          </a:lnRef>
+          <a:fillRef idx="3">
+            <a:schemeClr val="accent1"/>
+          </a:fillRef>
+          <a:effectRef idx="2">
+            <a:schemeClr val="accent1"/>
+          </a:effectRef>
+          <a:fontRef idx="minor">
+            <a:schemeClr val="lt1"/>
+          </a:fontRef>
+        </p:style>
+        <p:txBody>
+          <a:bodyPr rtlCol="0" anchor="ctr"/>
+          <a:lstStyle/>
+          <a:p>
+            <a:pPr algn="ctr"/>
+          </a:p>
+        </p:txBody>
+      </p:sp>
+      <p:sp>
+        <p:nvSpPr>
+          <p:cNvPr id="27" name="TextBox 26"/>
+          <p:cNvSpPr txBox="1"/>
+          <p:nvPr/>
+        </p:nvSpPr>
+        <p:spPr>
+          <a:xfrm>
+            <a:off x="6263640" y="2697480"/>
+            <a:ext cx="4114800" cy="365760"/>
+          </a:xfrm>
+          <a:prstGeom prst="rect">
+            <a:avLst/>
+          </a:prstGeom>
+          <a:noFill/>
+        </p:spPr>
+        <p:txBody>
+          <a:bodyPr wrap="square">
+            <a:spAutoFit/>
+          </a:bodyPr>
+          <a:lstStyle/>
+          <a:p>
+            <a:pPr algn="l"/>
+            <a:r>
+              <a:rPr sz="1100" b="1" i="0">
+                <a:solidFill>
+                  <a:srgbClr val="F7D060"/>
+                </a:solidFill>
+              </a:rPr>
+              <a:t>THE STATUS KIDS ACTUALLY GET</a:t>
+            </a:r>
+          </a:p>
+        </p:txBody>
+      </p:sp>
+      <p:sp>
+        <p:nvSpPr>
+          <p:cNvPr id="28" name="TextBox 27"/>
+          <p:cNvSpPr txBox="1"/>
+          <p:nvPr/>
+        </p:nvSpPr>
+        <p:spPr>
+          <a:xfrm>
+            <a:off x="6263640" y="3127248"/>
+            <a:ext cx="365760" cy="347472"/>
+          </a:xfrm>
+          <a:prstGeom prst="rect">
+            <a:avLst/>
+          </a:prstGeom>
+          <a:noFill/>
+        </p:spPr>
+        <p:txBody>
+          <a:bodyPr wrap="square">
+            <a:spAutoFit/>
+          </a:bodyPr>
+          <a:lstStyle/>
+          <a:p>
+            <a:pPr algn="l"/>
+            <a:r>
+              <a:rPr sz="1100" b="0" i="0">
+                <a:solidFill>
+                  <a:srgbClr val="FFFFFF"/>
+                </a:solidFill>
+              </a:rPr>
+              <a:t>⭐</a:t>
+            </a:r>
+          </a:p>
+        </p:txBody>
+      </p:sp>
+      <p:sp>
+        <p:nvSpPr>
+          <p:cNvPr id="29" name="TextBox 28"/>
+          <p:cNvSpPr txBox="1"/>
+          <p:nvPr/>
+        </p:nvSpPr>
+        <p:spPr>
+          <a:xfrm>
+            <a:off x="6675120" y="3145536"/>
+            <a:ext cx="4572000" cy="347472"/>
+          </a:xfrm>
+          <a:prstGeom prst="rect">
+            <a:avLst/>
+          </a:prstGeom>
+          <a:noFill/>
+        </p:spPr>
+        <p:txBody>
+          <a:bodyPr wrap="square">
+            <a:spAutoFit/>
+          </a:bodyPr>
+          <a:lstStyle/>
+          <a:p>
+            <a:pPr algn="l"/>
+            <a:r>
+              <a:rPr sz="1100" b="0" i="0">
+                <a:solidFill>
+                  <a:srgbClr val="E8F4F3"/>
+                </a:solidFill>
+              </a:rPr>
+              <a:t>A real public gallery of their artwork</a:t>
+            </a:r>
+          </a:p>
+        </p:txBody>
+      </p:sp>
+      <p:sp>
+        <p:nvSpPr>
+          <p:cNvPr id="30" name="TextBox 29"/>
+          <p:cNvSpPr txBox="1"/>
+          <p:nvPr/>
+        </p:nvSpPr>
+        <p:spPr>
+          <a:xfrm>
+            <a:off x="6263640" y="3547872"/>
+            <a:ext cx="365760" cy="347472"/>
+          </a:xfrm>
+          <a:prstGeom prst="rect">
+            <a:avLst/>
+          </a:prstGeom>
+          <a:noFill/>
+        </p:spPr>
+        <p:txBody>
+          <a:bodyPr wrap="square">
+            <a:spAutoFit/>
+          </a:bodyPr>
+          <a:lstStyle/>
+          <a:p>
+            <a:pPr algn="l"/>
+            <a:r>
+              <a:rPr sz="1100" b="0" i="0">
+                <a:solidFill>
+                  <a:srgbClr val="FFFFFF"/>
+                </a:solidFill>
+              </a:rPr>
+              <a:t>🏅</a:t>
+            </a:r>
+          </a:p>
+        </p:txBody>
+      </p:sp>
+      <p:sp>
+        <p:nvSpPr>
+          <p:cNvPr id="31" name="TextBox 30"/>
+          <p:cNvSpPr txBox="1"/>
+          <p:nvPr/>
+        </p:nvSpPr>
+        <p:spPr>
+          <a:xfrm>
+            <a:off x="6675120" y="3566160"/>
+            <a:ext cx="4572000" cy="347472"/>
+          </a:xfrm>
+          <a:prstGeom prst="rect">
+            <a:avLst/>
+          </a:prstGeom>
+          <a:noFill/>
+        </p:spPr>
+        <p:txBody>
+          <a:bodyPr wrap="square">
+            <a:spAutoFit/>
+          </a:bodyPr>
+          <a:lstStyle/>
+          <a:p>
+            <a:pPr algn="l"/>
+            <a:r>
+              <a:rPr sz="1100" b="0" i="0">
+                <a:solidFill>
+                  <a:srgbClr val="E8F4F3"/>
+                </a:solidFill>
+              </a:rPr>
+              <a:t>Creator badges and achievement levels</a:t>
+            </a:r>
+          </a:p>
+        </p:txBody>
+      </p:sp>
+      <p:sp>
+        <p:nvSpPr>
+          <p:cNvPr id="32" name="TextBox 31"/>
+          <p:cNvSpPr txBox="1"/>
+          <p:nvPr/>
+        </p:nvSpPr>
+        <p:spPr>
+          <a:xfrm>
+            <a:off x="6263640" y="3968496"/>
+            <a:ext cx="365760" cy="347472"/>
+          </a:xfrm>
+          <a:prstGeom prst="rect">
+            <a:avLst/>
+          </a:prstGeom>
+          <a:noFill/>
+        </p:spPr>
+        <p:txBody>
+          <a:bodyPr wrap="square">
+            <a:spAutoFit/>
+          </a:bodyPr>
+          <a:lstStyle/>
+          <a:p>
+            <a:pPr algn="l"/>
+            <a:r>
+              <a:rPr sz="1100" b="0" i="0">
+                <a:solidFill>
+                  <a:srgbClr val="FFFFFF"/>
+                </a:solidFill>
+              </a:rPr>
+              <a:t>🎉</a:t>
+            </a:r>
+          </a:p>
+        </p:txBody>
+      </p:sp>
+      <p:sp>
+        <p:nvSpPr>
+          <p:cNvPr id="33" name="TextBox 32"/>
+          <p:cNvSpPr txBox="1"/>
+          <p:nvPr/>
+        </p:nvSpPr>
+        <p:spPr>
+          <a:xfrm>
+            <a:off x="6675120" y="3986783"/>
+            <a:ext cx="4572000" cy="347472"/>
+          </a:xfrm>
+          <a:prstGeom prst="rect">
+            <a:avLst/>
+          </a:prstGeom>
+          <a:noFill/>
+        </p:spPr>
+        <p:txBody>
+          <a:bodyPr wrap="square">
+            <a:spAutoFit/>
+          </a:bodyPr>
+          <a:lstStyle/>
+          <a:p>
+            <a:pPr algn="l"/>
+            <a:r>
+              <a:rPr sz="1100" b="0" i="0">
+                <a:solidFill>
+                  <a:srgbClr val="E8F4F3"/>
+                </a:solidFill>
+              </a:rPr>
+              <a:t>Reactions and encouragement from peers</a:t>
+            </a:r>
+          </a:p>
+        </p:txBody>
+      </p:sp>
+      <p:sp>
+        <p:nvSpPr>
+          <p:cNvPr id="34" name="TextBox 33"/>
+          <p:cNvSpPr txBox="1"/>
+          <p:nvPr/>
+        </p:nvSpPr>
+        <p:spPr>
+          <a:xfrm>
+            <a:off x="6263640" y="4389120"/>
+            <a:ext cx="365760" cy="347472"/>
+          </a:xfrm>
+          <a:prstGeom prst="rect">
+            <a:avLst/>
+          </a:prstGeom>
+          <a:noFill/>
+        </p:spPr>
+        <p:txBody>
+          <a:bodyPr wrap="square">
+            <a:spAutoFit/>
+          </a:bodyPr>
+          <a:lstStyle/>
+          <a:p>
+            <a:pPr algn="l"/>
+            <a:r>
+              <a:rPr sz="1100" b="0" i="0">
+                <a:solidFill>
+                  <a:srgbClr val="FFFFFF"/>
+                </a:solidFill>
+              </a:rPr>
+              <a:t>📋</a:t>
+            </a:r>
+          </a:p>
+        </p:txBody>
+      </p:sp>
+      <p:sp>
+        <p:nvSpPr>
+          <p:cNvPr id="35" name="TextBox 34"/>
+          <p:cNvSpPr txBox="1"/>
+          <p:nvPr/>
+        </p:nvSpPr>
+        <p:spPr>
+          <a:xfrm>
+            <a:off x="6675120" y="4407407"/>
+            <a:ext cx="4572000" cy="347472"/>
+          </a:xfrm>
+          <a:prstGeom prst="rect">
+            <a:avLst/>
+          </a:prstGeom>
+          <a:noFill/>
+        </p:spPr>
+        <p:txBody>
+          <a:bodyPr wrap="square">
+            <a:spAutoFit/>
+          </a:bodyPr>
+          <a:lstStyle/>
+          <a:p>
+            <a:pPr algn="l"/>
+            <a:r>
+              <a:rPr sz="1100" b="0" i="0">
+                <a:solidFill>
+                  <a:srgbClr val="E8F4F3"/>
+                </a:solidFill>
+              </a:rPr>
+              <a:t>Monthly challenges to compete and share</a:t>
+            </a:r>
+          </a:p>
+        </p:txBody>
+      </p:sp>
+      <p:sp>
+        <p:nvSpPr>
+          <p:cNvPr id="36" name="TextBox 35"/>
+          <p:cNvSpPr txBox="1"/>
+          <p:nvPr/>
+        </p:nvSpPr>
+        <p:spPr>
+          <a:xfrm>
+            <a:off x="6263640" y="4809744"/>
+            <a:ext cx="365760" cy="347472"/>
+          </a:xfrm>
+          <a:prstGeom prst="rect">
+            <a:avLst/>
+          </a:prstGeom>
+          <a:noFill/>
+        </p:spPr>
+        <p:txBody>
+          <a:bodyPr wrap="square">
+            <a:spAutoFit/>
+          </a:bodyPr>
+          <a:lstStyle/>
+          <a:p>
+            <a:pPr algn="l"/>
+            <a:r>
+              <a:rPr sz="1100" b="0" i="0">
+                <a:solidFill>
+                  <a:srgbClr val="FFFFFF"/>
+                </a:solidFill>
+              </a:rPr>
+              <a:t>📬</a:t>
+            </a:r>
+          </a:p>
+        </p:txBody>
+      </p:sp>
+      <p:sp>
+        <p:nvSpPr>
+          <p:cNvPr id="37" name="TextBox 36"/>
+          <p:cNvSpPr txBox="1"/>
+          <p:nvPr/>
+        </p:nvSpPr>
+        <p:spPr>
+          <a:xfrm>
+            <a:off x="6675120" y="4828031"/>
+            <a:ext cx="4572000" cy="347472"/>
+          </a:xfrm>
+          <a:prstGeom prst="rect">
+            <a:avLst/>
+          </a:prstGeom>
+          <a:noFill/>
+        </p:spPr>
+        <p:txBody>
+          <a:bodyPr wrap="square">
+            <a:spAutoFit/>
+          </a:bodyPr>
+          <a:lstStyle/>
+          <a:p>
+            <a:pPr algn="l"/>
+            <a:r>
+              <a:rPr sz="1100" b="0" i="0">
+                <a:solidFill>
+                  <a:srgbClr val="E8F4F3"/>
+                </a:solidFill>
+              </a:rPr>
+              <a:t>Physical mail — the ultimate flex at school</a:t>
+            </a:r>
+          </a:p>
+        </p:txBody>
+      </p:sp>
+      <p:sp>
+        <p:nvSpPr>
+          <p:cNvPr id="38" name="TextBox 37"/>
+          <p:cNvSpPr txBox="1"/>
+          <p:nvPr/>
+        </p:nvSpPr>
+        <p:spPr>
+          <a:xfrm>
+            <a:off x="6263640" y="5230368"/>
+            <a:ext cx="365760" cy="347472"/>
+          </a:xfrm>
+          <a:prstGeom prst="rect">
+            <a:avLst/>
+          </a:prstGeom>
+          <a:noFill/>
+        </p:spPr>
+        <p:txBody>
+          <a:bodyPr wrap="square">
+            <a:spAutoFit/>
+          </a:bodyPr>
+          <a:lstStyle/>
+          <a:p>
+            <a:pPr algn="l"/>
+            <a:r>
+              <a:rPr sz="1100" b="0" i="0">
+                <a:solidFill>
+                  <a:srgbClr val="FFFFFF"/>
+                </a:solidFill>
+              </a:rPr>
+              <a:t>🌟</a:t>
+            </a:r>
+          </a:p>
+        </p:txBody>
+      </p:sp>
+      <p:sp>
+        <p:nvSpPr>
+          <p:cNvPr id="39" name="TextBox 38"/>
+          <p:cNvSpPr txBox="1"/>
+          <p:nvPr/>
+        </p:nvSpPr>
+        <p:spPr>
+          <a:xfrm>
+            <a:off x="6675120" y="5248655"/>
+            <a:ext cx="4572000" cy="347472"/>
+          </a:xfrm>
+          <a:prstGeom prst="rect">
+            <a:avLst/>
+          </a:prstGeom>
+          <a:noFill/>
+        </p:spPr>
+        <p:txBody>
+          <a:bodyPr wrap="square">
+            <a:spAutoFit/>
+          </a:bodyPr>
+          <a:lstStyle/>
+          <a:p>
+            <a:pPr algn="l"/>
+            <a:r>
+              <a:rPr sz="1100" b="0" i="0">
+                <a:solidFill>
+                  <a:srgbClr val="E8F4F3"/>
+                </a:solidFill>
+              </a:rPr>
+              <a:t>Featured "Artist of the Month" spotlight</a:t>
+            </a:r>
+          </a:p>
+        </p:txBody>
+      </p:sp>
+      <p:sp>
+        <p:nvSpPr>
+          <p:cNvPr id="40" name="TextBox 39"/>
+          <p:cNvSpPr txBox="1"/>
+          <p:nvPr/>
+        </p:nvSpPr>
+        <p:spPr>
+          <a:xfrm>
+            <a:off x="6263640" y="5650992"/>
+            <a:ext cx="365760" cy="347472"/>
+          </a:xfrm>
+          <a:prstGeom prst="rect">
+            <a:avLst/>
+          </a:prstGeom>
+          <a:noFill/>
+        </p:spPr>
+        <p:txBody>
+          <a:bodyPr wrap="square">
+            <a:spAutoFit/>
+          </a:bodyPr>
+          <a:lstStyle/>
+          <a:p>
+            <a:pPr algn="l"/>
+            <a:r>
+              <a:rPr sz="1100" b="0" i="0">
+                <a:solidFill>
+                  <a:srgbClr val="FFFFFF"/>
+                </a:solidFill>
+              </a:rPr>
+              <a:t>👑</a:t>
+            </a:r>
+          </a:p>
+        </p:txBody>
+      </p:sp>
+      <p:sp>
+        <p:nvSpPr>
+          <p:cNvPr id="41" name="TextBox 40"/>
+          <p:cNvSpPr txBox="1"/>
+          <p:nvPr/>
+        </p:nvSpPr>
+        <p:spPr>
+          <a:xfrm>
+            <a:off x="6675120" y="5669279"/>
+            <a:ext cx="4572000" cy="347472"/>
+          </a:xfrm>
+          <a:prstGeom prst="rect">
+            <a:avLst/>
+          </a:prstGeom>
+          <a:noFill/>
+        </p:spPr>
+        <p:txBody>
+          <a:bodyPr wrap="square">
+            <a:spAutoFit/>
+          </a:bodyPr>
+          <a:lstStyle/>
+          <a:p>
+            <a:pPr algn="l"/>
+            <a:r>
+              <a:rPr sz="1100" b="0" i="0">
+                <a:solidFill>
+                  <a:srgbClr val="E8F4F3"/>
+                </a:solidFill>
+              </a:rPr>
+              <a:t>"Creator Level" visible to the community</a:t>
+            </a:r>
+          </a:p>
+        </p:txBody>
+      </p:sp>
+      <p:sp>
+        <p:nvSpPr>
+          <p:cNvPr id="42" name="Rounded Rectangle 41"/>
+          <p:cNvSpPr/>
+          <p:nvPr/>
+        </p:nvSpPr>
+        <p:spPr>
+          <a:xfrm>
+            <a:off x="457200" y="6309360"/>
+            <a:ext cx="11155680" cy="438912"/>
+          </a:xfrm>
+          <a:prstGeom prst="roundRect">
+            <a:avLst/>
+          </a:prstGeom>
+          <a:solidFill>
+            <a:srgbClr val="28807D"/>
+          </a:solidFill>
+          <a:ln>
+            <a:noFill/>
+          </a:ln>
+        </p:spPr>
+        <p:style>
+          <a:lnRef idx="1">
+            <a:schemeClr val="accent1"/>
+          </a:lnRef>
+          <a:fillRef idx="3">
+            <a:schemeClr val="accent1"/>
+          </a:fillRef>
+          <a:effectRef idx="2">
+            <a:schemeClr val="accent1"/>
+          </a:effectRef>
+          <a:fontRef idx="minor">
+            <a:schemeClr val="lt1"/>
+          </a:fontRef>
+        </p:style>
+        <p:txBody>
+          <a:bodyPr rtlCol="0" anchor="ctr"/>
+          <a:lstStyle/>
+          <a:p>
+            <a:pPr algn="ctr"/>
+          </a:p>
+        </p:txBody>
+      </p:sp>
+      <p:sp>
+        <p:nvSpPr>
+          <p:cNvPr id="43" name="TextBox 42"/>
+          <p:cNvSpPr txBox="1"/>
+          <p:nvPr/>
+        </p:nvSpPr>
+        <p:spPr>
+          <a:xfrm>
+            <a:off x="640080" y="6373368"/>
+            <a:ext cx="10789920" cy="347472"/>
+          </a:xfrm>
+          <a:prstGeom prst="rect">
+            <a:avLst/>
+          </a:prstGeom>
+          <a:noFill/>
+        </p:spPr>
+        <p:txBody>
+          <a:bodyPr wrap="square">
+            <a:spAutoFit/>
+          </a:bodyPr>
+          <a:lstStyle/>
+          <a:p>
+            <a:pPr algn="l"/>
+            <a:r>
+              <a:rPr sz="1300" b="1" i="0">
+                <a:solidFill>
+                  <a:srgbClr val="063538"/>
+                </a:solidFill>
+              </a:rPr>
+              <a:t>= Kids get the status. Parents get the safety. No one has to compromise.</a:t>
+            </a:r>
+          </a:p>
+        </p:txBody>
+      </p:sp>
+    </p:spTree>
+  </p:cSld>
+  <p:clrMapOvr>
+    <a:masterClrMapping/>
+  </p:clrMapOvr>
+</p:sld>
+</file>
+
+<file path=ppt/slides/slide19.xml><?xml version="1.0" encoding="utf-8"?>
+<p:sld xmlns:a="http://schemas.openxmlformats.org/drawingml/2006/main" xmlns:p="http://schemas.openxmlformats.org/presentationml/2006/main" xmlns:r="http://schemas.openxmlformats.org/officeDocument/2006/relationships">
+  <p:cSld>
+    <p:bg>
+      <p:bgPr>
+        <a:solidFill>
+          <a:srgbClr val="0D2C2C"/>
+        </a:solidFill>
+        <a:effectLst/>
+      </p:bgPr>
+    </p:bg>
+    <p:spTree>
+      <p:nvGrpSpPr>
+        <p:cNvPr id="1" name=""/>
+        <p:cNvGrpSpPr/>
+        <p:nvPr/>
+      </p:nvGrpSpPr>
+      <p:grpSpPr/>
+      <p:sp>
+        <p:nvSpPr>
+          <p:cNvPr id="2" name="Rectangle 1"/>
+          <p:cNvSpPr/>
+          <p:nvPr/>
+        </p:nvSpPr>
+        <p:spPr>
+          <a:xfrm>
+            <a:off x="0" y="73152"/>
+            <a:ext cx="12188952" cy="54864"/>
+          </a:xfrm>
+          <a:prstGeom prst="rect">
+            <a:avLst/>
+          </a:prstGeom>
+          <a:solidFill>
+            <a:srgbClr val="4CC8C3"/>
+          </a:solidFill>
+          <a:ln>
+            <a:noFill/>
+          </a:ln>
+        </p:spPr>
+        <p:style>
+          <a:lnRef idx="1">
+            <a:schemeClr val="accent1"/>
+          </a:lnRef>
+          <a:fillRef idx="3">
+            <a:schemeClr val="accent1"/>
+          </a:fillRef>
+          <a:effectRef idx="2">
+            <a:schemeClr val="accent1"/>
+          </a:effectRef>
+          <a:fontRef idx="minor">
+            <a:schemeClr val="lt1"/>
+          </a:fontRef>
+        </p:style>
+        <p:txBody>
+          <a:bodyPr rtlCol="0" anchor="ctr"/>
+          <a:lstStyle/>
+          <a:p>
+            <a:pPr algn="ctr"/>
+          </a:p>
+        </p:txBody>
+      </p:sp>
+      <p:sp>
+        <p:nvSpPr>
+          <p:cNvPr id="3" name="TextBox 2"/>
+          <p:cNvSpPr txBox="1"/>
+          <p:nvPr/>
+        </p:nvSpPr>
+        <p:spPr>
+          <a:xfrm>
+            <a:off x="457200" y="502920"/>
+            <a:ext cx="4572000" cy="365760"/>
+          </a:xfrm>
+          <a:prstGeom prst="rect">
+            <a:avLst/>
+          </a:prstGeom>
+          <a:noFill/>
+        </p:spPr>
+        <p:txBody>
+          <a:bodyPr wrap="square">
+            <a:spAutoFit/>
+          </a:bodyPr>
+          <a:lstStyle/>
+          <a:p>
+            <a:pPr algn="l"/>
+            <a:r>
+              <a:rPr sz="1050" b="1" i="0">
+                <a:solidFill>
+                  <a:srgbClr val="4CC8C3"/>
+                </a:solidFill>
+              </a:rPr>
+              <a:t>THE BENEFITS</a:t>
+            </a:r>
+          </a:p>
+        </p:txBody>
+      </p:sp>
+      <p:sp>
+        <p:nvSpPr>
+          <p:cNvPr id="4" name="TextBox 3"/>
+          <p:cNvSpPr txBox="1"/>
+          <p:nvPr/>
+        </p:nvSpPr>
+        <p:spPr>
+          <a:xfrm>
+            <a:off x="11640312" y="6492240"/>
+            <a:ext cx="365760" cy="274320"/>
+          </a:xfrm>
+          <a:prstGeom prst="rect">
+            <a:avLst/>
+          </a:prstGeom>
+          <a:noFill/>
+        </p:spPr>
+        <p:txBody>
+          <a:bodyPr wrap="square">
+            <a:spAutoFit/>
+          </a:bodyPr>
+          <a:lstStyle/>
+          <a:p>
+            <a:pPr algn="r"/>
+            <a:r>
+              <a:rPr sz="950" b="0" i="0">
+                <a:solidFill>
+                  <a:srgbClr val="88AAA8"/>
+                </a:solidFill>
+              </a:rPr>
+              <a:t>19</a:t>
+            </a:r>
+          </a:p>
+        </p:txBody>
+      </p:sp>
+      <p:sp>
+        <p:nvSpPr>
+          <p:cNvPr id="5" name="TextBox 4"/>
+          <p:cNvSpPr txBox="1"/>
+          <p:nvPr/>
+        </p:nvSpPr>
+        <p:spPr>
+          <a:xfrm>
+            <a:off x="457200" y="914400"/>
+            <a:ext cx="8229600" cy="731520"/>
+          </a:xfrm>
+          <a:prstGeom prst="rect">
+            <a:avLst/>
+          </a:prstGeom>
+          <a:noFill/>
+        </p:spPr>
+        <p:txBody>
+          <a:bodyPr wrap="square">
+            <a:spAutoFit/>
+          </a:bodyPr>
+          <a:lstStyle/>
+          <a:p>
+            <a:pPr algn="l"/>
+            <a:r>
+              <a:rPr sz="2800" b="1" i="0">
+                <a:solidFill>
+                  <a:srgbClr val="FFFFFF"/>
+                </a:solidFill>
+              </a:rPr>
+              <a:t>Win-Win-Win. For Kids, Parents &amp; Society.</a:t>
+            </a:r>
+          </a:p>
+        </p:txBody>
+      </p:sp>
+      <p:sp>
+        <p:nvSpPr>
+          <p:cNvPr id="6" name="Rectangle 5"/>
+          <p:cNvSpPr/>
+          <p:nvPr/>
+        </p:nvSpPr>
+        <p:spPr>
+          <a:xfrm>
+            <a:off x="457200" y="1691640"/>
+            <a:ext cx="10972800" cy="45720"/>
+          </a:xfrm>
+          <a:prstGeom prst="rect">
+            <a:avLst/>
+          </a:prstGeom>
+          <a:solidFill>
+            <a:srgbClr val="4CC8C3"/>
+          </a:solidFill>
+          <a:ln>
+            <a:noFill/>
+          </a:ln>
+        </p:spPr>
+        <p:style>
+          <a:lnRef idx="1">
+            <a:schemeClr val="accent1"/>
+          </a:lnRef>
+          <a:fillRef idx="3">
+            <a:schemeClr val="accent1"/>
+          </a:fillRef>
+          <a:effectRef idx="2">
+            <a:schemeClr val="accent1"/>
+          </a:effectRef>
+          <a:fontRef idx="minor">
+            <a:schemeClr val="lt1"/>
+          </a:fontRef>
+        </p:style>
+        <p:txBody>
+          <a:bodyPr rtlCol="0" anchor="ctr"/>
+          <a:lstStyle/>
+          <a:p>
+            <a:pPr algn="ctr"/>
+          </a:p>
+        </p:txBody>
+      </p:sp>
+      <p:sp>
+        <p:nvSpPr>
+          <p:cNvPr id="7" name="Rounded Rectangle 6"/>
+          <p:cNvSpPr/>
+          <p:nvPr/>
+        </p:nvSpPr>
+        <p:spPr>
+          <a:xfrm>
+            <a:off x="457200" y="1874519"/>
+            <a:ext cx="3657600" cy="4389120"/>
+          </a:xfrm>
+          <a:prstGeom prst="roundRect">
+            <a:avLst/>
+          </a:prstGeom>
+          <a:solidFill>
+            <a:srgbClr val="063538"/>
+          </a:solidFill>
+          <a:ln>
+            <a:noFill/>
+          </a:ln>
+        </p:spPr>
+        <p:style>
+          <a:lnRef idx="1">
+            <a:schemeClr val="accent1"/>
+          </a:lnRef>
+          <a:fillRef idx="3">
+            <a:schemeClr val="accent1"/>
+          </a:fillRef>
+          <a:effectRef idx="2">
+            <a:schemeClr val="accent1"/>
+          </a:effectRef>
+          <a:fontRef idx="minor">
+            <a:schemeClr val="lt1"/>
+          </a:fontRef>
+        </p:style>
+        <p:txBody>
+          <a:bodyPr rtlCol="0" anchor="ctr"/>
+          <a:lstStyle/>
+          <a:p>
+            <a:pPr algn="ctr"/>
+          </a:p>
+        </p:txBody>
+      </p:sp>
+      <p:sp>
+        <p:nvSpPr>
+          <p:cNvPr id="8" name="Rectangle 7"/>
+          <p:cNvSpPr/>
+          <p:nvPr/>
+        </p:nvSpPr>
+        <p:spPr>
+          <a:xfrm>
+            <a:off x="457200" y="1874519"/>
+            <a:ext cx="3657600" cy="45720"/>
+          </a:xfrm>
+          <a:prstGeom prst="rect">
+            <a:avLst/>
+          </a:prstGeom>
+          <a:solidFill>
+            <a:srgbClr val="4CC8C3"/>
+          </a:solidFill>
+          <a:ln>
+            <a:noFill/>
+          </a:ln>
+        </p:spPr>
+        <p:style>
+          <a:lnRef idx="1">
+            <a:schemeClr val="accent1"/>
+          </a:lnRef>
+          <a:fillRef idx="3">
+            <a:schemeClr val="accent1"/>
+          </a:fillRef>
+          <a:effectRef idx="2">
+            <a:schemeClr val="accent1"/>
+          </a:effectRef>
+          <a:fontRef idx="minor">
+            <a:schemeClr val="lt1"/>
+          </a:fontRef>
+        </p:style>
+        <p:txBody>
+          <a:bodyPr rtlCol="0" anchor="ctr"/>
+          <a:lstStyle/>
+          <a:p>
+            <a:pPr algn="ctr"/>
+          </a:p>
+        </p:txBody>
+      </p:sp>
+      <p:sp>
+        <p:nvSpPr>
+          <p:cNvPr id="9" name="TextBox 8"/>
+          <p:cNvSpPr txBox="1"/>
+          <p:nvPr/>
+        </p:nvSpPr>
+        <p:spPr>
+          <a:xfrm>
+            <a:off x="594360" y="1965960"/>
+            <a:ext cx="3383280" cy="384048"/>
+          </a:xfrm>
+          <a:prstGeom prst="rect">
+            <a:avLst/>
+          </a:prstGeom>
+          <a:noFill/>
+        </p:spPr>
+        <p:txBody>
+          <a:bodyPr wrap="square">
+            <a:spAutoFit/>
+          </a:bodyPr>
+          <a:lstStyle/>
+          <a:p>
+            <a:pPr algn="l"/>
+            <a:r>
+              <a:rPr sz="1200" b="1" i="0">
+                <a:solidFill>
+                  <a:srgbClr val="4CC8C3"/>
+                </a:solidFill>
+              </a:rPr>
+              <a:t>🧒  FOR KIDS</a:t>
+            </a:r>
+          </a:p>
+        </p:txBody>
+      </p:sp>
+      <p:sp>
+        <p:nvSpPr>
+          <p:cNvPr id="10" name="TextBox 9"/>
+          <p:cNvSpPr txBox="1"/>
+          <p:nvPr/>
+        </p:nvSpPr>
+        <p:spPr>
+          <a:xfrm>
+            <a:off x="594360" y="2423160"/>
+            <a:ext cx="3383280" cy="384048"/>
+          </a:xfrm>
+          <a:prstGeom prst="rect">
+            <a:avLst/>
+          </a:prstGeom>
+          <a:noFill/>
+        </p:spPr>
+        <p:txBody>
+          <a:bodyPr wrap="square">
+            <a:spAutoFit/>
+          </a:bodyPr>
+          <a:lstStyle/>
+          <a:p>
+            <a:pPr algn="l"/>
+            <a:r>
+              <a:rPr sz="1100" b="0" i="0">
+                <a:solidFill>
+                  <a:srgbClr val="E8F4F3"/>
+                </a:solidFill>
+              </a:rPr>
+              <a:t>✓  Real social status among peers</a:t>
+            </a:r>
+          </a:p>
+        </p:txBody>
+      </p:sp>
+      <p:sp>
+        <p:nvSpPr>
+          <p:cNvPr id="11" name="TextBox 10"/>
+          <p:cNvSpPr txBox="1"/>
+          <p:nvPr/>
+        </p:nvSpPr>
+        <p:spPr>
+          <a:xfrm>
+            <a:off x="594360" y="2852928"/>
+            <a:ext cx="3383280" cy="384048"/>
+          </a:xfrm>
+          <a:prstGeom prst="rect">
+            <a:avLst/>
+          </a:prstGeom>
+          <a:noFill/>
+        </p:spPr>
+        <p:txBody>
+          <a:bodyPr wrap="square">
+            <a:spAutoFit/>
+          </a:bodyPr>
+          <a:lstStyle/>
+          <a:p>
+            <a:pPr algn="l"/>
+            <a:r>
+              <a:rPr sz="1100" b="0" i="0">
+                <a:solidFill>
+                  <a:srgbClr val="E8F4F3"/>
+                </a:solidFill>
+              </a:rPr>
+              <a:t>✓  Creative confidence that grows</a:t>
+            </a:r>
+          </a:p>
+        </p:txBody>
+      </p:sp>
+      <p:sp>
+        <p:nvSpPr>
+          <p:cNvPr id="12" name="TextBox 11"/>
+          <p:cNvSpPr txBox="1"/>
+          <p:nvPr/>
+        </p:nvSpPr>
+        <p:spPr>
+          <a:xfrm>
+            <a:off x="594360" y="3282696"/>
+            <a:ext cx="3383280" cy="384048"/>
+          </a:xfrm>
+          <a:prstGeom prst="rect">
+            <a:avLst/>
+          </a:prstGeom>
+          <a:noFill/>
+        </p:spPr>
+        <p:txBody>
+          <a:bodyPr wrap="square">
+            <a:spAutoFit/>
+          </a:bodyPr>
+          <a:lstStyle/>
+          <a:p>
+            <a:pPr algn="l"/>
+            <a:r>
+              <a:rPr sz="1100" b="0" i="0">
+                <a:solidFill>
+                  <a:srgbClr val="E8F4F3"/>
+                </a:solidFill>
+              </a:rPr>
+              <a:t>✓  Encouragement — not comparison</a:t>
+            </a:r>
+          </a:p>
+        </p:txBody>
+      </p:sp>
+      <p:sp>
+        <p:nvSpPr>
+          <p:cNvPr id="13" name="TextBox 12"/>
+          <p:cNvSpPr txBox="1"/>
+          <p:nvPr/>
+        </p:nvSpPr>
+        <p:spPr>
+          <a:xfrm>
+            <a:off x="594360" y="3712463"/>
+            <a:ext cx="3383280" cy="384048"/>
+          </a:xfrm>
+          <a:prstGeom prst="rect">
+            <a:avLst/>
+          </a:prstGeom>
+          <a:noFill/>
+        </p:spPr>
+        <p:txBody>
+          <a:bodyPr wrap="square">
+            <a:spAutoFit/>
+          </a:bodyPr>
+          <a:lstStyle/>
+          <a:p>
+            <a:pPr algn="l"/>
+            <a:r>
+              <a:rPr sz="1100" b="0" i="0">
+                <a:solidFill>
+                  <a:srgbClr val="E8F4F3"/>
+                </a:solidFill>
+              </a:rPr>
+              <a:t>✓  Achievement recognition &amp; badges</a:t>
+            </a:r>
+          </a:p>
+        </p:txBody>
+      </p:sp>
+      <p:sp>
+        <p:nvSpPr>
+          <p:cNvPr id="14" name="TextBox 13"/>
+          <p:cNvSpPr txBox="1"/>
+          <p:nvPr/>
+        </p:nvSpPr>
+        <p:spPr>
+          <a:xfrm>
+            <a:off x="594360" y="4142231"/>
+            <a:ext cx="3383280" cy="384048"/>
+          </a:xfrm>
+          <a:prstGeom prst="rect">
+            <a:avLst/>
+          </a:prstGeom>
+          <a:noFill/>
+        </p:spPr>
+        <p:txBody>
+          <a:bodyPr wrap="square">
+            <a:spAutoFit/>
+          </a:bodyPr>
+          <a:lstStyle/>
+          <a:p>
+            <a:pPr algn="l"/>
+            <a:r>
+              <a:rPr sz="1100" b="0" i="0">
+                <a:solidFill>
+                  <a:srgbClr val="E8F4F3"/>
+                </a:solidFill>
+              </a:rPr>
+              <a:t>✓  Physical mail that makes them feel famous</a:t>
+            </a:r>
+          </a:p>
+        </p:txBody>
+      </p:sp>
+      <p:sp>
+        <p:nvSpPr>
+          <p:cNvPr id="15" name="TextBox 14"/>
+          <p:cNvSpPr txBox="1"/>
+          <p:nvPr/>
+        </p:nvSpPr>
+        <p:spPr>
+          <a:xfrm>
+            <a:off x="594360" y="4571999"/>
+            <a:ext cx="3383280" cy="384048"/>
+          </a:xfrm>
+          <a:prstGeom prst="rect">
+            <a:avLst/>
+          </a:prstGeom>
+          <a:noFill/>
+        </p:spPr>
+        <p:txBody>
+          <a:bodyPr wrap="square">
+            <a:spAutoFit/>
+          </a:bodyPr>
+          <a:lstStyle/>
+          <a:p>
+            <a:pPr algn="l"/>
+            <a:r>
+              <a:rPr sz="1100" b="0" i="0">
+                <a:solidFill>
+                  <a:srgbClr val="E8F4F3"/>
+                </a:solidFill>
+              </a:rPr>
+              <a:t>✓  Monthly challenges keep it exciting</a:t>
+            </a:r>
+          </a:p>
+        </p:txBody>
+      </p:sp>
+      <p:sp>
+        <p:nvSpPr>
+          <p:cNvPr id="16" name="TextBox 15"/>
+          <p:cNvSpPr txBox="1"/>
+          <p:nvPr/>
+        </p:nvSpPr>
+        <p:spPr>
+          <a:xfrm>
+            <a:off x="594360" y="5001767"/>
+            <a:ext cx="3383280" cy="384048"/>
+          </a:xfrm>
+          <a:prstGeom prst="rect">
+            <a:avLst/>
+          </a:prstGeom>
+          <a:noFill/>
+        </p:spPr>
+        <p:txBody>
+          <a:bodyPr wrap="square">
+            <a:spAutoFit/>
+          </a:bodyPr>
+          <a:lstStyle/>
+          <a:p>
+            <a:pPr algn="l"/>
+            <a:r>
+              <a:rPr sz="1100" b="0" i="0">
+                <a:solidFill>
+                  <a:srgbClr val="E8F4F3"/>
+                </a:solidFill>
+              </a:rPr>
+              <a:t>✓  Zero cyberbullying or toxic content</a:t>
+            </a:r>
+          </a:p>
+        </p:txBody>
+      </p:sp>
+      <p:sp>
+        <p:nvSpPr>
+          <p:cNvPr id="17" name="Rounded Rectangle 16"/>
+          <p:cNvSpPr/>
+          <p:nvPr/>
+        </p:nvSpPr>
+        <p:spPr>
+          <a:xfrm>
+            <a:off x="4251960" y="1874519"/>
+            <a:ext cx="3657600" cy="4389120"/>
+          </a:xfrm>
+          <a:prstGeom prst="roundRect">
+            <a:avLst/>
+          </a:prstGeom>
+          <a:solidFill>
+            <a:srgbClr val="063538"/>
+          </a:solidFill>
+          <a:ln>
+            <a:noFill/>
+          </a:ln>
+        </p:spPr>
+        <p:style>
+          <a:lnRef idx="1">
+            <a:schemeClr val="accent1"/>
+          </a:lnRef>
+          <a:fillRef idx="3">
+            <a:schemeClr val="accent1"/>
+          </a:fillRef>
+          <a:effectRef idx="2">
+            <a:schemeClr val="accent1"/>
+          </a:effectRef>
+          <a:fontRef idx="minor">
+            <a:schemeClr val="lt1"/>
+          </a:fontRef>
+        </p:style>
+        <p:txBody>
+          <a:bodyPr rtlCol="0" anchor="ctr"/>
+          <a:lstStyle/>
+          <a:p>
+            <a:pPr algn="ctr"/>
+          </a:p>
+        </p:txBody>
+      </p:sp>
+      <p:sp>
+        <p:nvSpPr>
+          <p:cNvPr id="18" name="Rectangle 17"/>
+          <p:cNvSpPr/>
+          <p:nvPr/>
+        </p:nvSpPr>
+        <p:spPr>
+          <a:xfrm>
+            <a:off x="4251960" y="1874519"/>
+            <a:ext cx="3657600" cy="45720"/>
+          </a:xfrm>
+          <a:prstGeom prst="rect">
+            <a:avLst/>
+          </a:prstGeom>
+          <a:solidFill>
+            <a:srgbClr val="F7D060"/>
+          </a:solidFill>
+          <a:ln>
+            <a:noFill/>
+          </a:ln>
+        </p:spPr>
+        <p:style>
+          <a:lnRef idx="1">
+            <a:schemeClr val="accent1"/>
+          </a:lnRef>
+          <a:fillRef idx="3">
+            <a:schemeClr val="accent1"/>
+          </a:fillRef>
+          <a:effectRef idx="2">
+            <a:schemeClr val="accent1"/>
+          </a:effectRef>
+          <a:fontRef idx="minor">
+            <a:schemeClr val="lt1"/>
+          </a:fontRef>
+        </p:style>
+        <p:txBody>
+          <a:bodyPr rtlCol="0" anchor="ctr"/>
+          <a:lstStyle/>
+          <a:p>
+            <a:pPr algn="ctr"/>
+          </a:p>
+        </p:txBody>
+      </p:sp>
+      <p:sp>
+        <p:nvSpPr>
+          <p:cNvPr id="19" name="TextBox 18"/>
+          <p:cNvSpPr txBox="1"/>
+          <p:nvPr/>
+        </p:nvSpPr>
+        <p:spPr>
+          <a:xfrm>
+            <a:off x="4389120" y="1965960"/>
+            <a:ext cx="3383280" cy="384048"/>
+          </a:xfrm>
+          <a:prstGeom prst="rect">
+            <a:avLst/>
+          </a:prstGeom>
+          <a:noFill/>
+        </p:spPr>
+        <p:txBody>
+          <a:bodyPr wrap="square">
+            <a:spAutoFit/>
+          </a:bodyPr>
+          <a:lstStyle/>
+          <a:p>
+            <a:pPr algn="l"/>
+            <a:r>
+              <a:rPr sz="1200" b="1" i="0">
+                <a:solidFill>
+                  <a:srgbClr val="F7D060"/>
+                </a:solidFill>
+              </a:rPr>
+              <a:t>👨‍👩‍👧  FOR PARENTS</a:t>
+            </a:r>
+          </a:p>
+        </p:txBody>
+      </p:sp>
+      <p:sp>
+        <p:nvSpPr>
+          <p:cNvPr id="20" name="TextBox 19"/>
+          <p:cNvSpPr txBox="1"/>
+          <p:nvPr/>
+        </p:nvSpPr>
+        <p:spPr>
+          <a:xfrm>
+            <a:off x="4389120" y="2423160"/>
+            <a:ext cx="3383280" cy="384048"/>
+          </a:xfrm>
+          <a:prstGeom prst="rect">
+            <a:avLst/>
+          </a:prstGeom>
+          <a:noFill/>
+        </p:spPr>
+        <p:txBody>
+          <a:bodyPr wrap="square">
+            <a:spAutoFit/>
+          </a:bodyPr>
+          <a:lstStyle/>
+          <a:p>
+            <a:pPr algn="l"/>
+            <a:r>
+              <a:rPr sz="1100" b="0" i="0">
+                <a:solidFill>
+                  <a:srgbClr val="E8F4F3"/>
+                </a:solidFill>
+              </a:rPr>
+              <a:t>✓  Full control — approve every post</a:t>
+            </a:r>
+          </a:p>
+        </p:txBody>
+      </p:sp>
+      <p:sp>
+        <p:nvSpPr>
+          <p:cNvPr id="21" name="TextBox 20"/>
+          <p:cNvSpPr txBox="1"/>
+          <p:nvPr/>
+        </p:nvSpPr>
+        <p:spPr>
+          <a:xfrm>
+            <a:off x="4389120" y="2852928"/>
+            <a:ext cx="3383280" cy="384048"/>
+          </a:xfrm>
+          <a:prstGeom prst="rect">
+            <a:avLst/>
+          </a:prstGeom>
+          <a:noFill/>
+        </p:spPr>
+        <p:txBody>
+          <a:bodyPr wrap="square">
+            <a:spAutoFit/>
+          </a:bodyPr>
+          <a:lstStyle/>
+          <a:p>
+            <a:pPr algn="l"/>
+            <a:r>
+              <a:rPr sz="1100" b="0" i="0">
+                <a:solidFill>
+                  <a:srgbClr val="E8F4F3"/>
+                </a:solidFill>
+              </a:rPr>
+              <a:t>✓  Peace of mind — no strangers, no DMs</a:t>
+            </a:r>
+          </a:p>
+        </p:txBody>
+      </p:sp>
+      <p:sp>
+        <p:nvSpPr>
+          <p:cNvPr id="22" name="TextBox 21"/>
+          <p:cNvSpPr txBox="1"/>
+          <p:nvPr/>
+        </p:nvSpPr>
+        <p:spPr>
+          <a:xfrm>
+            <a:off x="4389120" y="3282696"/>
+            <a:ext cx="3383280" cy="384048"/>
+          </a:xfrm>
+          <a:prstGeom prst="rect">
+            <a:avLst/>
+          </a:prstGeom>
+          <a:noFill/>
+        </p:spPr>
+        <p:txBody>
+          <a:bodyPr wrap="square">
+            <a:spAutoFit/>
+          </a:bodyPr>
+          <a:lstStyle/>
+          <a:p>
+            <a:pPr algn="l"/>
+            <a:r>
+              <a:rPr sz="1100" b="0" i="0">
+                <a:solidFill>
+                  <a:srgbClr val="E8F4F3"/>
+                </a:solidFill>
+              </a:rPr>
+              <a:t>✓  No addictive engagement mechanics</a:t>
+            </a:r>
+          </a:p>
+        </p:txBody>
+      </p:sp>
+      <p:sp>
+        <p:nvSpPr>
+          <p:cNvPr id="23" name="TextBox 22"/>
+          <p:cNvSpPr txBox="1"/>
+          <p:nvPr/>
+        </p:nvSpPr>
+        <p:spPr>
+          <a:xfrm>
+            <a:off x="4389120" y="3712463"/>
+            <a:ext cx="3383280" cy="384048"/>
+          </a:xfrm>
+          <a:prstGeom prst="rect">
+            <a:avLst/>
+          </a:prstGeom>
+          <a:noFill/>
+        </p:spPr>
+        <p:txBody>
+          <a:bodyPr wrap="square">
+            <a:spAutoFit/>
+          </a:bodyPr>
+          <a:lstStyle/>
+          <a:p>
+            <a:pPr algn="l"/>
+            <a:r>
+              <a:rPr sz="1100" b="0" i="0">
+                <a:solidFill>
+                  <a:srgbClr val="E8F4F3"/>
+                </a:solidFill>
+              </a:rPr>
+              <a:t>✓  COPPA-compliant, privacy-first design</a:t>
+            </a:r>
+          </a:p>
+        </p:txBody>
+      </p:sp>
+      <p:sp>
+        <p:nvSpPr>
+          <p:cNvPr id="24" name="TextBox 23"/>
+          <p:cNvSpPr txBox="1"/>
+          <p:nvPr/>
+        </p:nvSpPr>
+        <p:spPr>
+          <a:xfrm>
+            <a:off x="4389120" y="4142231"/>
+            <a:ext cx="3383280" cy="384048"/>
+          </a:xfrm>
+          <a:prstGeom prst="rect">
+            <a:avLst/>
+          </a:prstGeom>
+          <a:noFill/>
+        </p:spPr>
+        <p:txBody>
+          <a:bodyPr wrap="square">
+            <a:spAutoFit/>
+          </a:bodyPr>
+          <a:lstStyle/>
+          <a:p>
+            <a:pPr algn="l"/>
+            <a:r>
+              <a:rPr sz="1100" b="0" i="0">
+                <a:solidFill>
+                  <a:srgbClr val="E8F4F3"/>
+                </a:solidFill>
+              </a:rPr>
+              <a:t>✓  Builds creativity not screen addiction</a:t>
+            </a:r>
+          </a:p>
+        </p:txBody>
+      </p:sp>
+      <p:sp>
+        <p:nvSpPr>
+          <p:cNvPr id="25" name="TextBox 24"/>
+          <p:cNvSpPr txBox="1"/>
+          <p:nvPr/>
+        </p:nvSpPr>
+        <p:spPr>
+          <a:xfrm>
+            <a:off x="4389120" y="4571999"/>
+            <a:ext cx="3383280" cy="384048"/>
+          </a:xfrm>
+          <a:prstGeom prst="rect">
+            <a:avLst/>
+          </a:prstGeom>
+          <a:noFill/>
+        </p:spPr>
+        <p:txBody>
+          <a:bodyPr wrap="square">
+            <a:spAutoFit/>
+          </a:bodyPr>
+          <a:lstStyle/>
+          <a:p>
+            <a:pPr algn="l"/>
+            <a:r>
+              <a:rPr sz="1100" b="0" i="0">
+                <a:solidFill>
+                  <a:srgbClr val="E8F4F3"/>
+                </a:solidFill>
+              </a:rPr>
+              <a:t>✓  Visibility into every interaction</a:t>
+            </a:r>
+          </a:p>
+        </p:txBody>
+      </p:sp>
+      <p:sp>
+        <p:nvSpPr>
+          <p:cNvPr id="26" name="TextBox 25"/>
+          <p:cNvSpPr txBox="1"/>
+          <p:nvPr/>
+        </p:nvSpPr>
+        <p:spPr>
+          <a:xfrm>
+            <a:off x="4389120" y="5001767"/>
+            <a:ext cx="3383280" cy="384048"/>
+          </a:xfrm>
+          <a:prstGeom prst="rect">
+            <a:avLst/>
+          </a:prstGeom>
+          <a:noFill/>
+        </p:spPr>
+        <p:txBody>
+          <a:bodyPr wrap="square">
+            <a:spAutoFit/>
+          </a:bodyPr>
+          <a:lstStyle/>
+          <a:p>
+            <a:pPr algn="l"/>
+            <a:r>
+              <a:rPr sz="1100" b="0" i="0">
+                <a:solidFill>
+                  <a:srgbClr val="E8F4F3"/>
+                </a:solidFill>
+              </a:rPr>
+              <a:t>✓  Easy guilt-free "yes" to social media</a:t>
+            </a:r>
+          </a:p>
+        </p:txBody>
+      </p:sp>
+      <p:sp>
+        <p:nvSpPr>
+          <p:cNvPr id="27" name="Rounded Rectangle 26"/>
+          <p:cNvSpPr/>
+          <p:nvPr/>
+        </p:nvSpPr>
+        <p:spPr>
+          <a:xfrm>
+            <a:off x="8046720" y="1874519"/>
+            <a:ext cx="3657600" cy="4389120"/>
+          </a:xfrm>
+          <a:prstGeom prst="roundRect">
+            <a:avLst/>
+          </a:prstGeom>
+          <a:solidFill>
+            <a:srgbClr val="063538"/>
+          </a:solidFill>
+          <a:ln>
+            <a:noFill/>
+          </a:ln>
+        </p:spPr>
+        <p:style>
+          <a:lnRef idx="1">
+            <a:schemeClr val="accent1"/>
+          </a:lnRef>
+          <a:fillRef idx="3">
+            <a:schemeClr val="accent1"/>
+          </a:fillRef>
+          <a:effectRef idx="2">
+            <a:schemeClr val="accent1"/>
+          </a:effectRef>
+          <a:fontRef idx="minor">
+            <a:schemeClr val="lt1"/>
+          </a:fontRef>
+        </p:style>
+        <p:txBody>
+          <a:bodyPr rtlCol="0" anchor="ctr"/>
+          <a:lstStyle/>
+          <a:p>
+            <a:pPr algn="ctr"/>
+          </a:p>
+        </p:txBody>
+      </p:sp>
+      <p:sp>
+        <p:nvSpPr>
+          <p:cNvPr id="28" name="Rectangle 27"/>
+          <p:cNvSpPr/>
+          <p:nvPr/>
+        </p:nvSpPr>
+        <p:spPr>
+          <a:xfrm>
+            <a:off x="8046720" y="1874519"/>
+            <a:ext cx="3657600" cy="45720"/>
+          </a:xfrm>
+          <a:prstGeom prst="rect">
+            <a:avLst/>
+          </a:prstGeom>
+          <a:solidFill>
+            <a:srgbClr val="A0E1DF"/>
+          </a:solidFill>
+          <a:ln>
+            <a:noFill/>
+          </a:ln>
+        </p:spPr>
+        <p:style>
+          <a:lnRef idx="1">
+            <a:schemeClr val="accent1"/>
+          </a:lnRef>
+          <a:fillRef idx="3">
+            <a:schemeClr val="accent1"/>
+          </a:fillRef>
+          <a:effectRef idx="2">
+            <a:schemeClr val="accent1"/>
+          </a:effectRef>
+          <a:fontRef idx="minor">
+            <a:schemeClr val="lt1"/>
+          </a:fontRef>
+        </p:style>
+        <p:txBody>
+          <a:bodyPr rtlCol="0" anchor="ctr"/>
+          <a:lstStyle/>
+          <a:p>
+            <a:pPr algn="ctr"/>
+          </a:p>
+        </p:txBody>
+      </p:sp>
+      <p:sp>
+        <p:nvSpPr>
+          <p:cNvPr id="29" name="TextBox 28"/>
+          <p:cNvSpPr txBox="1"/>
+          <p:nvPr/>
+        </p:nvSpPr>
+        <p:spPr>
+          <a:xfrm>
+            <a:off x="8183880" y="1965960"/>
+            <a:ext cx="3383280" cy="384048"/>
+          </a:xfrm>
+          <a:prstGeom prst="rect">
+            <a:avLst/>
+          </a:prstGeom>
+          <a:noFill/>
+        </p:spPr>
+        <p:txBody>
+          <a:bodyPr wrap="square">
+            <a:spAutoFit/>
+          </a:bodyPr>
+          <a:lstStyle/>
+          <a:p>
+            <a:pPr algn="l"/>
+            <a:r>
+              <a:rPr sz="1200" b="1" i="0">
+                <a:solidFill>
+                  <a:srgbClr val="A0E1DF"/>
+                </a:solidFill>
+              </a:rPr>
+              <a:t>🌍  FOR SOCIETY</a:t>
+            </a:r>
+          </a:p>
+        </p:txBody>
+      </p:sp>
+      <p:sp>
+        <p:nvSpPr>
+          <p:cNvPr id="30" name="TextBox 29"/>
+          <p:cNvSpPr txBox="1"/>
+          <p:nvPr/>
+        </p:nvSpPr>
+        <p:spPr>
+          <a:xfrm>
+            <a:off x="8183880" y="2423160"/>
+            <a:ext cx="3383280" cy="384048"/>
+          </a:xfrm>
+          <a:prstGeom prst="rect">
+            <a:avLst/>
+          </a:prstGeom>
+          <a:noFill/>
+        </p:spPr>
+        <p:txBody>
+          <a:bodyPr wrap="square">
+            <a:spAutoFit/>
+          </a:bodyPr>
+          <a:lstStyle/>
+          <a:p>
+            <a:pPr algn="l"/>
+            <a:r>
+              <a:rPr sz="1100" b="0" i="0">
+                <a:solidFill>
+                  <a:srgbClr val="E8F4F3"/>
+                </a:solidFill>
+              </a:rPr>
+              <a:t>✓  Proof safe social media is possible</a:t>
+            </a:r>
+          </a:p>
+        </p:txBody>
+      </p:sp>
+      <p:sp>
+        <p:nvSpPr>
+          <p:cNvPr id="31" name="TextBox 30"/>
+          <p:cNvSpPr txBox="1"/>
+          <p:nvPr/>
+        </p:nvSpPr>
+        <p:spPr>
+          <a:xfrm>
+            <a:off x="8183880" y="2852928"/>
+            <a:ext cx="3383280" cy="384048"/>
+          </a:xfrm>
+          <a:prstGeom prst="rect">
+            <a:avLst/>
+          </a:prstGeom>
+          <a:noFill/>
+        </p:spPr>
+        <p:txBody>
+          <a:bodyPr wrap="square">
+            <a:spAutoFit/>
+          </a:bodyPr>
+          <a:lstStyle/>
+          <a:p>
+            <a:pPr algn="l"/>
+            <a:r>
+              <a:rPr sz="1100" b="0" i="0">
+                <a:solidFill>
+                  <a:srgbClr val="E8F4F3"/>
+                </a:solidFill>
+              </a:rPr>
+              <a:t>✓  Kids develop creativity, not anxiety</a:t>
+            </a:r>
+          </a:p>
+        </p:txBody>
+      </p:sp>
+      <p:sp>
+        <p:nvSpPr>
+          <p:cNvPr id="32" name="TextBox 31"/>
+          <p:cNvSpPr txBox="1"/>
+          <p:nvPr/>
+        </p:nvSpPr>
+        <p:spPr>
+          <a:xfrm>
+            <a:off x="8183880" y="3282696"/>
+            <a:ext cx="3383280" cy="384048"/>
+          </a:xfrm>
+          <a:prstGeom prst="rect">
+            <a:avLst/>
+          </a:prstGeom>
+          <a:noFill/>
+        </p:spPr>
+        <p:txBody>
+          <a:bodyPr wrap="square">
+            <a:spAutoFit/>
+          </a:bodyPr>
+          <a:lstStyle/>
+          <a:p>
+            <a:pPr algn="l"/>
+            <a:r>
+              <a:rPr sz="1100" b="0" i="0">
+                <a:solidFill>
+                  <a:srgbClr val="E8F4F3"/>
+                </a:solidFill>
+              </a:rPr>
+              <a:t>✓  Physical mail reduces digital overload</a:t>
+            </a:r>
+          </a:p>
+        </p:txBody>
+      </p:sp>
+      <p:sp>
+        <p:nvSpPr>
+          <p:cNvPr id="33" name="TextBox 32"/>
+          <p:cNvSpPr txBox="1"/>
+          <p:nvPr/>
+        </p:nvSpPr>
+        <p:spPr>
+          <a:xfrm>
+            <a:off x="8183880" y="3712463"/>
+            <a:ext cx="3383280" cy="384048"/>
+          </a:xfrm>
+          <a:prstGeom prst="rect">
+            <a:avLst/>
+          </a:prstGeom>
+          <a:noFill/>
+        </p:spPr>
+        <p:txBody>
+          <a:bodyPr wrap="square">
+            <a:spAutoFit/>
+          </a:bodyPr>
+          <a:lstStyle/>
+          <a:p>
+            <a:pPr algn="l"/>
+            <a:r>
+              <a:rPr sz="1100" b="0" i="0">
+                <a:solidFill>
+                  <a:srgbClr val="E8F4F3"/>
+                </a:solidFill>
+              </a:rPr>
+              <a:t>✓  Family bonds strengthened, not broken</a:t>
+            </a:r>
+          </a:p>
+        </p:txBody>
+      </p:sp>
+      <p:sp>
+        <p:nvSpPr>
+          <p:cNvPr id="34" name="TextBox 33"/>
+          <p:cNvSpPr txBox="1"/>
+          <p:nvPr/>
+        </p:nvSpPr>
+        <p:spPr>
+          <a:xfrm>
+            <a:off x="8183880" y="4142231"/>
+            <a:ext cx="3383280" cy="384048"/>
+          </a:xfrm>
+          <a:prstGeom prst="rect">
+            <a:avLst/>
+          </a:prstGeom>
+          <a:noFill/>
+        </p:spPr>
+        <p:txBody>
+          <a:bodyPr wrap="square">
+            <a:spAutoFit/>
+          </a:bodyPr>
+          <a:lstStyle/>
+          <a:p>
+            <a:pPr algn="l"/>
+            <a:r>
+              <a:rPr sz="1100" b="0" i="0">
+                <a:solidFill>
+                  <a:srgbClr val="E8F4F3"/>
+                </a:solidFill>
+              </a:rPr>
+              <a:t>✓  Alternative to algorithm-driven feeds</a:t>
+            </a:r>
+          </a:p>
+        </p:txBody>
+      </p:sp>
+      <p:sp>
+        <p:nvSpPr>
+          <p:cNvPr id="35" name="TextBox 34"/>
+          <p:cNvSpPr txBox="1"/>
+          <p:nvPr/>
+        </p:nvSpPr>
+        <p:spPr>
+          <a:xfrm>
+            <a:off x="8183880" y="4571999"/>
+            <a:ext cx="3383280" cy="384048"/>
+          </a:xfrm>
+          <a:prstGeom prst="rect">
+            <a:avLst/>
+          </a:prstGeom>
+          <a:noFill/>
+        </p:spPr>
+        <p:txBody>
+          <a:bodyPr wrap="square">
+            <a:spAutoFit/>
+          </a:bodyPr>
+          <a:lstStyle/>
+          <a:p>
+            <a:pPr algn="l"/>
+            <a:r>
+              <a:rPr sz="1100" b="0" i="0">
+                <a:solidFill>
+                  <a:srgbClr val="E8F4F3"/>
+                </a:solidFill>
+              </a:rPr>
+              <a:t>✓  A generation of confident young creators</a:t>
+            </a:r>
+          </a:p>
+        </p:txBody>
+      </p:sp>
+      <p:sp>
+        <p:nvSpPr>
+          <p:cNvPr id="36" name="TextBox 35"/>
+          <p:cNvSpPr txBox="1"/>
+          <p:nvPr/>
+        </p:nvSpPr>
+        <p:spPr>
+          <a:xfrm>
+            <a:off x="8183880" y="5001767"/>
+            <a:ext cx="3383280" cy="384048"/>
+          </a:xfrm>
+          <a:prstGeom prst="rect">
+            <a:avLst/>
+          </a:prstGeom>
+          <a:noFill/>
+        </p:spPr>
+        <p:txBody>
+          <a:bodyPr wrap="square">
+            <a:spAutoFit/>
+          </a:bodyPr>
+          <a:lstStyle/>
+          <a:p>
+            <a:pPr algn="l"/>
+            <a:r>
+              <a:rPr sz="1100" b="0" i="0">
+                <a:solidFill>
+                  <a:srgbClr val="E8F4F3"/>
+                </a:solidFill>
+              </a:rPr>
+              <a:t>✓  Healthy relationship with technology</a:t>
+            </a:r>
+          </a:p>
+        </p:txBody>
+      </p:sp>
+      <p:sp>
+        <p:nvSpPr>
+          <p:cNvPr id="37" name="Rounded Rectangle 36"/>
+          <p:cNvSpPr/>
+          <p:nvPr/>
+        </p:nvSpPr>
+        <p:spPr>
+          <a:xfrm>
+            <a:off x="457200" y="6446520"/>
+            <a:ext cx="11155680" cy="347472"/>
+          </a:xfrm>
+          <a:prstGeom prst="roundRect">
+            <a:avLst/>
+          </a:prstGeom>
+          <a:solidFill>
+            <a:srgbClr val="4CC8C3"/>
+          </a:solidFill>
+          <a:ln>
+            <a:noFill/>
+          </a:ln>
+        </p:spPr>
+        <p:style>
+          <a:lnRef idx="1">
+            <a:schemeClr val="accent1"/>
+          </a:lnRef>
+          <a:fillRef idx="3">
+            <a:schemeClr val="accent1"/>
+          </a:fillRef>
+          <a:effectRef idx="2">
+            <a:schemeClr val="accent1"/>
+          </a:effectRef>
+          <a:fontRef idx="minor">
+            <a:schemeClr val="lt1"/>
+          </a:fontRef>
+        </p:style>
+        <p:txBody>
+          <a:bodyPr rtlCol="0" anchor="ctr"/>
+          <a:lstStyle/>
+          <a:p>
+            <a:pPr algn="ctr"/>
+          </a:p>
+        </p:txBody>
+      </p:sp>
+      <p:sp>
+        <p:nvSpPr>
+          <p:cNvPr id="38" name="TextBox 37"/>
+          <p:cNvSpPr txBox="1"/>
+          <p:nvPr/>
+        </p:nvSpPr>
+        <p:spPr>
+          <a:xfrm>
+            <a:off x="640080" y="6492240"/>
+            <a:ext cx="10789920" cy="256032"/>
+          </a:xfrm>
+          <a:prstGeom prst="rect">
+            <a:avLst/>
+          </a:prstGeom>
+          <a:noFill/>
+        </p:spPr>
+        <p:txBody>
+          <a:bodyPr wrap="square">
+            <a:spAutoFit/>
+          </a:bodyPr>
+          <a:lstStyle/>
+          <a:p>
+            <a:pPr algn="l"/>
+            <a:r>
+              <a:rPr sz="1200" b="1" i="0">
+                <a:solidFill>
+                  <a:srgbClr val="063538"/>
+                </a:solidFill>
+              </a:rPr>
+              <a:t>Kids Creativity Confidence Club is the first social platform where parents approve — and kids actually want to use it.</a:t>
             </a:r>
           </a:p>
         </p:txBody>
